--- a/public/fun/cards/expert/expert-09.pptx
+++ b/public/fun/cards/expert/expert-09.pptx
@@ -3099,20 +3099,22 @@
       <p:grpSpPr/>
       <p:sp>
         <p:nvSpPr>
-          <p:cNvPr id="2" name="Rectangle 1"/>
+          <p:cNvPr id="2" name="Rounded Rectangle 1"/>
           <p:cNvSpPr/>
           <p:nvPr/>
         </p:nvSpPr>
         <p:spPr>
           <a:xfrm>
-            <a:off x="2196000" y="0"/>
-            <a:ext cx="1044000" cy="1800000"/>
+            <a:off x="252000" y="230400"/>
+            <a:ext cx="540000" cy="180000"/>
           </a:xfrm>
-          <a:prstGeom prst="rect">
-            <a:avLst/>
+          <a:prstGeom prst="roundRect">
+            <a:avLst>
+              <a:gd name="adj" fmla="val 50000"/>
+            </a:avLst>
           </a:prstGeom>
           <a:solidFill>
-            <a:srgbClr val="994133"/>
+            <a:srgbClr val="0F9D58"/>
           </a:solidFill>
           <a:ln>
             <a:noFill/>
@@ -3126,69 +3128,126 @@
           </a:p>
         </p:txBody>
       </p:sp>
-      <p:cxnSp>
-        <p:nvCxnSpPr>
-          <p:cNvPr id="3" name="Connector 2"/>
-          <p:cNvCxnSpPr/>
+      <p:sp>
+        <p:nvSpPr>
+          <p:cNvPr id="3" name="텍스트"/>
+          <p:cNvSpPr txBox="1"/>
           <p:nvPr/>
-        </p:nvCxnSpPr>
+        </p:nvSpPr>
         <p:spPr>
-          <a:xfrm flipH="1">
-            <a:off x="2516400" y="588960"/>
-            <a:ext cx="131040" cy="131040"/>
+          <a:xfrm>
+            <a:off x="252000" y="230400"/>
+            <a:ext cx="540000" cy="180000"/>
           </a:xfrm>
-          <a:prstGeom prst="line">
+          <a:prstGeom prst="rect">
             <a:avLst/>
           </a:prstGeom>
-          <a:ln w="40320">
-            <a:solidFill>
-              <a:srgbClr val="FFFFFF"/>
-            </a:solidFill>
-          </a:ln>
+          <a:noFill/>
         </p:spPr>
-      </p:cxnSp>
-      <p:cxnSp>
-        <p:nvCxnSpPr>
-          <p:cNvPr id="4" name="Connector 3"/>
-          <p:cNvCxnSpPr/>
+        <p:txBody>
+          <a:bodyPr wrap="square" lIns="0" rIns="0" tIns="0" bIns="0" anchor="ctr">
+            <a:spAutoFit/>
+          </a:bodyPr>
+          <a:lstStyle/>
+          <a:p>
+            <a:pPr algn="ctr">
+              <a:lnSpc>
+                <a:spcPts val="1160"/>
+              </a:lnSpc>
+            </a:pPr>
+            <a:r>
+              <a:rPr sz="800" b="1">
+                <a:solidFill>
+                  <a:srgbClr val="FFFFFF"/>
+                </a:solidFill>
+                <a:latin typeface="맑은 고딕"/>
+                <a:ea typeface="맑은 고딕"/>
+              </a:rPr>
+              <a:t>작가</a:t>
+            </a:r>
+          </a:p>
+        </p:txBody>
+      </p:sp>
+      <p:sp>
+        <p:nvSpPr>
+          <p:cNvPr id="4" name="텍스트"/>
+          <p:cNvSpPr txBox="1"/>
           <p:nvPr/>
-        </p:nvCxnSpPr>
+        </p:nvSpPr>
         <p:spPr>
           <a:xfrm>
-            <a:off x="2516400" y="720000"/>
-            <a:ext cx="131040" cy="131040"/>
+            <a:off x="252000" y="568800"/>
+            <a:ext cx="2520000" cy="396000"/>
           </a:xfrm>
-          <a:prstGeom prst="line">
+          <a:prstGeom prst="rect">
             <a:avLst/>
           </a:prstGeom>
-          <a:ln w="40320">
-            <a:solidFill>
-              <a:srgbClr val="FFFFFF"/>
-            </a:solidFill>
-          </a:ln>
+          <a:noFill/>
         </p:spPr>
-      </p:cxnSp>
-      <p:cxnSp>
-        <p:nvCxnSpPr>
-          <p:cNvPr id="5" name="Connector 4"/>
-          <p:cNvCxnSpPr/>
+        <p:txBody>
+          <a:bodyPr wrap="square" lIns="0" rIns="0" tIns="0" bIns="0" anchor="t">
+            <a:spAutoFit/>
+          </a:bodyPr>
+          <a:lstStyle/>
+          <a:p>
+            <a:pPr algn="l">
+              <a:lnSpc>
+                <a:spcPts val="3479"/>
+              </a:lnSpc>
+            </a:pPr>
+            <a:r>
+              <a:rPr sz="2400" b="1">
+                <a:solidFill>
+                  <a:srgbClr val="12151C"/>
+                </a:solidFill>
+                <a:latin typeface="맑은 고딕"/>
+                <a:ea typeface="맑은 고딕"/>
+              </a:rPr>
+              <a:t>장서연</a:t>
+            </a:r>
+          </a:p>
+        </p:txBody>
+      </p:sp>
+      <p:sp>
+        <p:nvSpPr>
+          <p:cNvPr id="5" name="텍스트"/>
+          <p:cNvSpPr txBox="1"/>
           <p:nvPr/>
-        </p:nvCxnSpPr>
+        </p:nvSpPr>
         <p:spPr>
           <a:xfrm>
-            <a:off x="2788560" y="588960"/>
-            <a:ext cx="131040" cy="131040"/>
+            <a:off x="252000" y="993600"/>
+            <a:ext cx="2160000" cy="152401"/>
           </a:xfrm>
-          <a:prstGeom prst="line">
+          <a:prstGeom prst="rect">
             <a:avLst/>
           </a:prstGeom>
-          <a:ln w="40320">
-            <a:solidFill>
-              <a:srgbClr val="FFFFFF"/>
-            </a:solidFill>
-          </a:ln>
+          <a:noFill/>
         </p:spPr>
-      </p:cxnSp>
+        <p:txBody>
+          <a:bodyPr wrap="square" lIns="0" rIns="0" tIns="0" bIns="0" anchor="t">
+            <a:spAutoFit/>
+          </a:bodyPr>
+          <a:lstStyle/>
+          <a:p>
+            <a:pPr algn="l">
+              <a:lnSpc>
+                <a:spcPts val="1160"/>
+              </a:lnSpc>
+            </a:pPr>
+            <a:r>
+              <a:rPr sz="800" b="0">
+                <a:solidFill>
+                  <a:srgbClr val="6B7280"/>
+                </a:solidFill>
+                <a:latin typeface="맑은 고딕"/>
+                <a:ea typeface="맑은 고딕"/>
+              </a:rPr>
+              <a:t>소속 · 브랜드</a:t>
+            </a:r>
+          </a:p>
+        </p:txBody>
+      </p:sp>
       <p:cxnSp>
         <p:nvCxnSpPr>
           <p:cNvPr id="6" name="Connector 5"/>
@@ -3196,51 +3255,30 @@
           <p:nvPr/>
         </p:nvCxnSpPr>
         <p:spPr>
-          <a:xfrm flipH="1">
-            <a:off x="2788560" y="720000"/>
-            <a:ext cx="131040" cy="131040"/>
+          <a:xfrm>
+            <a:off x="252000" y="1209600"/>
+            <a:ext cx="2736000" cy="0"/>
           </a:xfrm>
           <a:prstGeom prst="line">
             <a:avLst/>
           </a:prstGeom>
-          <a:ln w="40320">
+          <a:ln w="5760">
             <a:solidFill>
-              <a:srgbClr val="FFFFFF"/>
+              <a:srgbClr val="E3E5E9"/>
             </a:solidFill>
           </a:ln>
         </p:spPr>
       </p:cxnSp>
-      <p:cxnSp>
-        <p:nvCxnSpPr>
-          <p:cNvPr id="7" name="Connector 6"/>
-          <p:cNvCxnSpPr/>
-          <p:nvPr/>
-        </p:nvCxnSpPr>
-        <p:spPr>
-          <a:xfrm flipH="1">
-            <a:off x="2677680" y="548640"/>
-            <a:ext cx="80640" cy="342720"/>
-          </a:xfrm>
-          <a:prstGeom prst="line">
-            <a:avLst/>
-          </a:prstGeom>
-          <a:ln w="35280">
-            <a:solidFill>
-              <a:srgbClr val="737373"/>
-            </a:solidFill>
-          </a:ln>
-        </p:spPr>
-      </p:cxnSp>
-      <p:sp>
-        <p:nvSpPr>
-          <p:cNvPr id="8" name="텍스트"/>
+      <p:sp>
+        <p:nvSpPr>
+          <p:cNvPr id="7" name="텍스트"/>
           <p:cNvSpPr txBox="1"/>
           <p:nvPr/>
         </p:nvSpPr>
         <p:spPr>
           <a:xfrm>
-            <a:off x="2268000" y="1224000"/>
-            <a:ext cx="900000" cy="216000"/>
+            <a:off x="252000" y="1299600"/>
+            <a:ext cx="331200" cy="99061"/>
           </a:xfrm>
           <a:prstGeom prst="rect">
             <a:avLst/>
@@ -3253,34 +3291,34 @@
           </a:bodyPr>
           <a:lstStyle/>
           <a:p>
-            <a:pPr algn="ctr">
+            <a:pPr algn="l">
               <a:lnSpc>
-                <a:spcPts val="1160"/>
+                <a:spcPts val="754"/>
               </a:lnSpc>
             </a:pPr>
             <a:r>
-              <a:rPr sz="800" b="1" spc="150">
+              <a:rPr sz="520" b="1" spc="120">
                 <a:solidFill>
-                  <a:srgbClr val="FFFFFF"/>
+                  <a:srgbClr val="6B7280"/>
                 </a:solidFill>
                 <a:latin typeface="맑은 고딕"/>
                 <a:ea typeface="맑은 고딕"/>
               </a:rPr>
-              <a:t>소속 · 브랜드</a:t>
-            </a:r>
-          </a:p>
-        </p:txBody>
-      </p:sp>
-      <p:sp>
-        <p:nvSpPr>
-          <p:cNvPr id="9" name="텍스트"/>
+              <a:t>TEL</a:t>
+            </a:r>
+          </a:p>
+        </p:txBody>
+      </p:sp>
+      <p:sp>
+        <p:nvSpPr>
+          <p:cNvPr id="8" name="텍스트"/>
           <p:cNvSpPr txBox="1"/>
           <p:nvPr/>
         </p:nvSpPr>
         <p:spPr>
           <a:xfrm>
-            <a:off x="216000" y="331200"/>
-            <a:ext cx="1872000" cy="313692"/>
+            <a:off x="583200" y="1288800"/>
+            <a:ext cx="1512000" cy="129541"/>
           </a:xfrm>
           <a:prstGeom prst="rect">
             <a:avLst/>
@@ -3295,32 +3333,32 @@
           <a:p>
             <a:pPr algn="l">
               <a:lnSpc>
-                <a:spcPts val="2755"/>
+                <a:spcPts val="986"/>
               </a:lnSpc>
             </a:pPr>
             <a:r>
-              <a:rPr sz="1900" b="1" spc="50">
+              <a:rPr sz="680" b="0">
                 <a:solidFill>
-                  <a:srgbClr val="4D2019"/>
+                  <a:srgbClr val="12151C"/>
                 </a:solidFill>
                 <a:latin typeface="맑은 고딕"/>
                 <a:ea typeface="맑은 고딕"/>
               </a:rPr>
-              <a:t>장서연</a:t>
-            </a:r>
-          </a:p>
-        </p:txBody>
-      </p:sp>
-      <p:sp>
-        <p:nvSpPr>
-          <p:cNvPr id="10" name="텍스트"/>
+              <a:t>010-1234-5678</a:t>
+            </a:r>
+          </a:p>
+        </p:txBody>
+      </p:sp>
+      <p:sp>
+        <p:nvSpPr>
+          <p:cNvPr id="9" name="텍스트"/>
           <p:cNvSpPr txBox="1"/>
           <p:nvPr/>
         </p:nvSpPr>
         <p:spPr>
           <a:xfrm>
-            <a:off x="216000" y="619200"/>
-            <a:ext cx="1872000" cy="122400"/>
+            <a:off x="252000" y="1429200"/>
+            <a:ext cx="331200" cy="99061"/>
           </a:xfrm>
           <a:prstGeom prst="rect">
             <a:avLst/>
@@ -3335,61 +3373,32 @@
           <a:p>
             <a:pPr algn="l">
               <a:lnSpc>
-                <a:spcPts val="1232"/>
+                <a:spcPts val="754"/>
               </a:lnSpc>
             </a:pPr>
             <a:r>
-              <a:rPr sz="850" b="1">
+              <a:rPr sz="520" b="1" spc="120">
                 <a:solidFill>
-                  <a:srgbClr val="994133"/>
+                  <a:srgbClr val="6B7280"/>
                 </a:solidFill>
                 <a:latin typeface="맑은 고딕"/>
                 <a:ea typeface="맑은 고딕"/>
               </a:rPr>
-              <a:t>작가</a:t>
-            </a:r>
-          </a:p>
-        </p:txBody>
-      </p:sp>
-      <p:sp>
-        <p:nvSpPr>
-          <p:cNvPr id="11" name="Rectangle 10"/>
-          <p:cNvSpPr/>
+              <a:t>MAIL</a:t>
+            </a:r>
+          </a:p>
+        </p:txBody>
+      </p:sp>
+      <p:sp>
+        <p:nvSpPr>
+          <p:cNvPr id="10" name="텍스트"/>
+          <p:cNvSpPr txBox="1"/>
           <p:nvPr/>
         </p:nvSpPr>
         <p:spPr>
           <a:xfrm>
-            <a:off x="216000" y="828000"/>
-            <a:ext cx="201600" cy="14400"/>
-          </a:xfrm>
-          <a:prstGeom prst="rect">
-            <a:avLst/>
-          </a:prstGeom>
-          <a:solidFill>
-            <a:srgbClr val="994133"/>
-          </a:solidFill>
-          <a:ln>
-            <a:noFill/>
-          </a:ln>
-        </p:spPr>
-        <p:txBody>
-          <a:bodyPr rtlCol="0" anchor="ctr"/>
-          <a:lstStyle/>
-          <a:p>
-            <a:pPr algn="ctr"/>
-          </a:p>
-        </p:txBody>
-      </p:sp>
-      <p:sp>
-        <p:nvSpPr>
-          <p:cNvPr id="12" name="텍스트"/>
-          <p:cNvSpPr txBox="1"/>
-          <p:nvPr/>
-        </p:nvSpPr>
-        <p:spPr>
-          <a:xfrm>
-            <a:off x="216000" y="1008000"/>
-            <a:ext cx="122400" cy="168911"/>
+            <a:off x="583200" y="1418400"/>
+            <a:ext cx="1512000" cy="129541"/>
           </a:xfrm>
           <a:prstGeom prst="rect">
             <a:avLst/>
@@ -3404,32 +3413,32 @@
           <a:p>
             <a:pPr algn="l">
               <a:lnSpc>
-                <a:spcPts val="1015"/>
+                <a:spcPts val="986"/>
               </a:lnSpc>
             </a:pPr>
             <a:r>
-              <a:rPr sz="700" b="1">
+              <a:rPr sz="680" b="0">
                 <a:solidFill>
-                  <a:srgbClr val="994133"/>
+                  <a:srgbClr val="12151C"/>
                 </a:solidFill>
                 <a:latin typeface="맑은 고딕"/>
                 <a:ea typeface="맑은 고딕"/>
               </a:rPr>
-              <a:t>T</a:t>
-            </a:r>
-          </a:p>
-        </p:txBody>
-      </p:sp>
-      <p:sp>
-        <p:nvSpPr>
-          <p:cNvPr id="13" name="텍스트"/>
+              <a:t>name@example.com</a:t>
+            </a:r>
+          </a:p>
+        </p:txBody>
+      </p:sp>
+      <p:sp>
+        <p:nvSpPr>
+          <p:cNvPr id="11" name="텍스트"/>
           <p:cNvSpPr txBox="1"/>
           <p:nvPr/>
         </p:nvSpPr>
         <p:spPr>
           <a:xfrm>
-            <a:off x="360000" y="1008000"/>
-            <a:ext cx="1584000" cy="168911"/>
+            <a:off x="252000" y="1558800"/>
+            <a:ext cx="331200" cy="99061"/>
           </a:xfrm>
           <a:prstGeom prst="rect">
             <a:avLst/>
@@ -3444,32 +3453,32 @@
           <a:p>
             <a:pPr algn="l">
               <a:lnSpc>
-                <a:spcPts val="1015"/>
+                <a:spcPts val="754"/>
               </a:lnSpc>
             </a:pPr>
             <a:r>
-              <a:rPr sz="700" b="0">
+              <a:rPr sz="520" b="1" spc="120">
                 <a:solidFill>
-                  <a:srgbClr val="4D2019"/>
+                  <a:srgbClr val="6B7280"/>
                 </a:solidFill>
                 <a:latin typeface="맑은 고딕"/>
                 <a:ea typeface="맑은 고딕"/>
               </a:rPr>
-              <a:t>010-1234-5678</a:t>
-            </a:r>
-          </a:p>
-        </p:txBody>
-      </p:sp>
-      <p:sp>
-        <p:nvSpPr>
-          <p:cNvPr id="14" name="텍스트"/>
+              <a:t>ADDR</a:t>
+            </a:r>
+          </a:p>
+        </p:txBody>
+      </p:sp>
+      <p:sp>
+        <p:nvSpPr>
+          <p:cNvPr id="12" name="텍스트"/>
           <p:cNvSpPr txBox="1"/>
           <p:nvPr/>
         </p:nvSpPr>
         <p:spPr>
           <a:xfrm>
-            <a:off x="216000" y="1176911"/>
-            <a:ext cx="122400" cy="168911"/>
+            <a:off x="583200" y="1548000"/>
+            <a:ext cx="1512000" cy="129541"/>
           </a:xfrm>
           <a:prstGeom prst="rect">
             <a:avLst/>
@@ -3484,133 +3493,13 @@
           <a:p>
             <a:pPr algn="l">
               <a:lnSpc>
-                <a:spcPts val="1015"/>
+                <a:spcPts val="986"/>
               </a:lnSpc>
             </a:pPr>
             <a:r>
-              <a:rPr sz="700" b="1">
+              <a:rPr sz="680" b="0">
                 <a:solidFill>
-                  <a:srgbClr val="994133"/>
-                </a:solidFill>
-                <a:latin typeface="맑은 고딕"/>
-                <a:ea typeface="맑은 고딕"/>
-              </a:rPr>
-              <a:t>E</a:t>
-            </a:r>
-          </a:p>
-        </p:txBody>
-      </p:sp>
-      <p:sp>
-        <p:nvSpPr>
-          <p:cNvPr id="15" name="텍스트"/>
-          <p:cNvSpPr txBox="1"/>
-          <p:nvPr/>
-        </p:nvSpPr>
-        <p:spPr>
-          <a:xfrm>
-            <a:off x="360000" y="1176911"/>
-            <a:ext cx="1584000" cy="168911"/>
-          </a:xfrm>
-          <a:prstGeom prst="rect">
-            <a:avLst/>
-          </a:prstGeom>
-          <a:noFill/>
-        </p:spPr>
-        <p:txBody>
-          <a:bodyPr wrap="square" lIns="0" rIns="0" tIns="0" bIns="0" anchor="t">
-            <a:spAutoFit/>
-          </a:bodyPr>
-          <a:lstStyle/>
-          <a:p>
-            <a:pPr algn="l">
-              <a:lnSpc>
-                <a:spcPts val="1015"/>
-              </a:lnSpc>
-            </a:pPr>
-            <a:r>
-              <a:rPr sz="700" b="0">
-                <a:solidFill>
-                  <a:srgbClr val="4D2019"/>
-                </a:solidFill>
-                <a:latin typeface="맑은 고딕"/>
-                <a:ea typeface="맑은 고딕"/>
-              </a:rPr>
-              <a:t>name@example.com</a:t>
-            </a:r>
-          </a:p>
-        </p:txBody>
-      </p:sp>
-      <p:sp>
-        <p:nvSpPr>
-          <p:cNvPr id="16" name="텍스트"/>
-          <p:cNvSpPr txBox="1"/>
-          <p:nvPr/>
-        </p:nvSpPr>
-        <p:spPr>
-          <a:xfrm>
-            <a:off x="216000" y="1345822"/>
-            <a:ext cx="122400" cy="168911"/>
-          </a:xfrm>
-          <a:prstGeom prst="rect">
-            <a:avLst/>
-          </a:prstGeom>
-          <a:noFill/>
-        </p:spPr>
-        <p:txBody>
-          <a:bodyPr wrap="square" lIns="0" rIns="0" tIns="0" bIns="0" anchor="t">
-            <a:spAutoFit/>
-          </a:bodyPr>
-          <a:lstStyle/>
-          <a:p>
-            <a:pPr algn="l">
-              <a:lnSpc>
-                <a:spcPts val="1015"/>
-              </a:lnSpc>
-            </a:pPr>
-            <a:r>
-              <a:rPr sz="700" b="1">
-                <a:solidFill>
-                  <a:srgbClr val="994133"/>
-                </a:solidFill>
-                <a:latin typeface="맑은 고딕"/>
-                <a:ea typeface="맑은 고딕"/>
-              </a:rPr>
-              <a:t>A</a:t>
-            </a:r>
-          </a:p>
-        </p:txBody>
-      </p:sp>
-      <p:sp>
-        <p:nvSpPr>
-          <p:cNvPr id="17" name="텍스트"/>
-          <p:cNvSpPr txBox="1"/>
-          <p:nvPr/>
-        </p:nvSpPr>
-        <p:spPr>
-          <a:xfrm>
-            <a:off x="360000" y="1345822"/>
-            <a:ext cx="1584000" cy="168911"/>
-          </a:xfrm>
-          <a:prstGeom prst="rect">
-            <a:avLst/>
-          </a:prstGeom>
-          <a:noFill/>
-        </p:spPr>
-        <p:txBody>
-          <a:bodyPr wrap="square" lIns="0" rIns="0" tIns="0" bIns="0" anchor="t">
-            <a:spAutoFit/>
-          </a:bodyPr>
-          <a:lstStyle/>
-          <a:p>
-            <a:pPr algn="l">
-              <a:lnSpc>
-                <a:spcPts val="1015"/>
-              </a:lnSpc>
-            </a:pPr>
-            <a:r>
-              <a:rPr sz="700" b="0">
-                <a:solidFill>
-                  <a:srgbClr val="4D2019"/>
+                  <a:srgbClr val="12151C"/>
                 </a:solidFill>
                 <a:latin typeface="맑은 고딕"/>
                 <a:ea typeface="맑은 고딕"/>
@@ -3634,7 +3523,7 @@
     <p:bg>
       <p:bgPr>
         <a:solidFill>
-          <a:srgbClr val="FBF8F2"/>
+          <a:srgbClr val="F3F4F6"/>
         </a:solidFill>
         <a:effectLst/>
       </p:bgPr>
@@ -3654,14 +3543,14 @@
         </p:nvSpPr>
         <p:spPr>
           <a:xfrm>
-            <a:off x="0" y="0"/>
-            <a:ext cx="273600" cy="1800000"/>
+            <a:off x="2088000" y="0"/>
+            <a:ext cx="1152000" cy="1800000"/>
           </a:xfrm>
           <a:prstGeom prst="rect">
             <a:avLst/>
           </a:prstGeom>
           <a:solidFill>
-            <a:srgbClr val="3B9171"/>
+            <a:srgbClr val="0F9D58"/>
           </a:solidFill>
           <a:ln>
             <a:noFill/>
@@ -3675,121 +3564,45 @@
           </a:p>
         </p:txBody>
       </p:sp>
-      <p:cxnSp>
-        <p:nvCxnSpPr>
-          <p:cNvPr id="3" name="Connector 2"/>
-          <p:cNvCxnSpPr/>
+      <p:sp>
+        <p:nvSpPr>
+          <p:cNvPr id="3" name="Oval 2"/>
+          <p:cNvSpPr/>
           <p:nvPr/>
-        </p:nvCxnSpPr>
+        </p:nvSpPr>
         <p:spPr>
-          <a:xfrm flipH="1">
-            <a:off x="73440" y="196416"/>
-            <a:ext cx="41184" cy="41184"/>
+          <a:xfrm>
+            <a:off x="2397600" y="633600"/>
+            <a:ext cx="532800" cy="532800"/>
           </a:xfrm>
-          <a:prstGeom prst="line">
+          <a:prstGeom prst="ellipse">
             <a:avLst/>
           </a:prstGeom>
-          <a:ln w="12672">
+          <a:noFill/>
+          <a:ln w="10800">
             <a:solidFill>
               <a:srgbClr val="FFFFFF"/>
             </a:solidFill>
           </a:ln>
         </p:spPr>
-      </p:cxnSp>
-      <p:cxnSp>
-        <p:nvCxnSpPr>
-          <p:cNvPr id="4" name="Connector 3"/>
-          <p:cNvCxnSpPr/>
+        <p:txBody>
+          <a:bodyPr rtlCol="0" anchor="ctr"/>
+          <a:lstStyle/>
+          <a:p>
+            <a:pPr algn="ctr"/>
+          </a:p>
+        </p:txBody>
+      </p:sp>
+      <p:sp>
+        <p:nvSpPr>
+          <p:cNvPr id="4" name="텍스트"/>
+          <p:cNvSpPr txBox="1"/>
           <p:nvPr/>
-        </p:nvCxnSpPr>
+        </p:nvSpPr>
         <p:spPr>
           <a:xfrm>
-            <a:off x="73440" y="237600"/>
-            <a:ext cx="41184" cy="41184"/>
-          </a:xfrm>
-          <a:prstGeom prst="line">
-            <a:avLst/>
-          </a:prstGeom>
-          <a:ln w="12672">
-            <a:solidFill>
-              <a:srgbClr val="FFFFFF"/>
-            </a:solidFill>
-          </a:ln>
-        </p:spPr>
-      </p:cxnSp>
-      <p:cxnSp>
-        <p:nvCxnSpPr>
-          <p:cNvPr id="5" name="Connector 4"/>
-          <p:cNvCxnSpPr/>
-          <p:nvPr/>
-        </p:nvCxnSpPr>
-        <p:spPr>
-          <a:xfrm>
-            <a:off x="158976" y="196416"/>
-            <a:ext cx="41184" cy="41184"/>
-          </a:xfrm>
-          <a:prstGeom prst="line">
-            <a:avLst/>
-          </a:prstGeom>
-          <a:ln w="12672">
-            <a:solidFill>
-              <a:srgbClr val="FFFFFF"/>
-            </a:solidFill>
-          </a:ln>
-        </p:spPr>
-      </p:cxnSp>
-      <p:cxnSp>
-        <p:nvCxnSpPr>
-          <p:cNvPr id="6" name="Connector 5"/>
-          <p:cNvCxnSpPr/>
-          <p:nvPr/>
-        </p:nvCxnSpPr>
-        <p:spPr>
-          <a:xfrm flipH="1">
-            <a:off x="158976" y="237600"/>
-            <a:ext cx="41184" cy="41184"/>
-          </a:xfrm>
-          <a:prstGeom prst="line">
-            <a:avLst/>
-          </a:prstGeom>
-          <a:ln w="12672">
-            <a:solidFill>
-              <a:srgbClr val="FFFFFF"/>
-            </a:solidFill>
-          </a:ln>
-        </p:spPr>
-      </p:cxnSp>
-      <p:cxnSp>
-        <p:nvCxnSpPr>
-          <p:cNvPr id="7" name="Connector 6"/>
-          <p:cNvCxnSpPr/>
-          <p:nvPr/>
-        </p:nvCxnSpPr>
-        <p:spPr>
-          <a:xfrm flipH="1">
-            <a:off x="124128" y="183744"/>
-            <a:ext cx="25344" cy="107712"/>
-          </a:xfrm>
-          <a:prstGeom prst="line">
-            <a:avLst/>
-          </a:prstGeom>
-          <a:ln w="11088">
-            <a:solidFill>
-              <a:srgbClr val="737373"/>
-            </a:solidFill>
-          </a:ln>
-        </p:spPr>
-      </p:cxnSp>
-      <p:sp>
-        <p:nvSpPr>
-          <p:cNvPr id="8" name="텍스트"/>
-          <p:cNvSpPr txBox="1"/>
-          <p:nvPr/>
-        </p:nvSpPr>
-        <p:spPr>
-          <a:xfrm>
-            <a:off x="504000" y="396000"/>
-            <a:ext cx="1800000" cy="720000"/>
+            <a:off x="2304000" y="684000"/>
+            <a:ext cx="720000" cy="432000"/>
           </a:xfrm>
           <a:prstGeom prst="rect">
             <a:avLst/>
@@ -3802,51 +3615,34 @@
           </a:bodyPr>
           <a:lstStyle/>
           <a:p>
-            <a:pPr algn="l">
+            <a:pPr algn="ctr">
               <a:lnSpc>
-                <a:spcPts val="1667"/>
+                <a:spcPts val="4350"/>
               </a:lnSpc>
             </a:pPr>
             <a:r>
-              <a:rPr sz="1150" b="1">
+              <a:rPr sz="3000" b="1">
                 <a:solidFill>
-                  <a:srgbClr val="4D2019"/>
+                  <a:srgbClr val="FFFFFF"/>
                 </a:solidFill>
                 <a:latin typeface="맑은 고딕"/>
                 <a:ea typeface="맑은 고딕"/>
               </a:rPr>
-              <a:t>데이터 너머의</a:t>
-            </a:r>
-          </a:p>
-          <a:p>
-            <a:pPr algn="l">
-              <a:lnSpc>
-                <a:spcPts val="1667"/>
-              </a:lnSpc>
-            </a:pPr>
-            <a:r>
-              <a:rPr sz="1150" b="1">
-                <a:solidFill>
-                  <a:srgbClr val="4D2019"/>
-                </a:solidFill>
-                <a:latin typeface="맑은 고딕"/>
-                <a:ea typeface="맑은 고딕"/>
-              </a:rPr>
-              <a:t>사람을 봅니다</a:t>
-            </a:r>
-          </a:p>
-        </p:txBody>
-      </p:sp>
-      <p:sp>
-        <p:nvSpPr>
-          <p:cNvPr id="9" name="텍스트"/>
+              <a:t>소</a:t>
+            </a:r>
+          </a:p>
+        </p:txBody>
+      </p:sp>
+      <p:sp>
+        <p:nvSpPr>
+          <p:cNvPr id="5" name="텍스트"/>
           <p:cNvSpPr txBox="1"/>
           <p:nvPr/>
         </p:nvSpPr>
         <p:spPr>
           <a:xfrm>
-            <a:off x="504000" y="1260000"/>
-            <a:ext cx="1728000" cy="108000"/>
+            <a:off x="252000" y="540000"/>
+            <a:ext cx="1620000" cy="720000"/>
           </a:xfrm>
           <a:prstGeom prst="rect">
             <a:avLst/>
@@ -3861,62 +3657,49 @@
           <a:p>
             <a:pPr algn="l">
               <a:lnSpc>
-                <a:spcPts val="1087"/>
+                <a:spcPts val="1739"/>
               </a:lnSpc>
             </a:pPr>
             <a:r>
-              <a:rPr sz="750" b="1" spc="200">
+              <a:rPr sz="1200" b="1">
                 <a:solidFill>
-                  <a:srgbClr val="836760"/>
+                  <a:srgbClr val="12151C"/>
                 </a:solidFill>
                 <a:latin typeface="맑은 고딕"/>
                 <a:ea typeface="맑은 고딕"/>
               </a:rPr>
-              <a:t>소속 · 브랜드</a:t>
-            </a:r>
-          </a:p>
-        </p:txBody>
-      </p:sp>
-      <p:sp>
-        <p:nvSpPr>
-          <p:cNvPr id="10" name="Rectangle 9"/>
-          <p:cNvSpPr/>
+              <a:t>데이터 너머의</a:t>
+            </a:r>
+          </a:p>
+          <a:p>
+            <a:pPr algn="l">
+              <a:lnSpc>
+                <a:spcPts val="1739"/>
+              </a:lnSpc>
+            </a:pPr>
+            <a:r>
+              <a:rPr sz="1200" b="1">
+                <a:solidFill>
+                  <a:srgbClr val="12151C"/>
+                </a:solidFill>
+                <a:latin typeface="맑은 고딕"/>
+                <a:ea typeface="맑은 고딕"/>
+              </a:rPr>
+              <a:t>사람을 봅니다</a:t>
+            </a:r>
+          </a:p>
+        </p:txBody>
+      </p:sp>
+      <p:sp>
+        <p:nvSpPr>
+          <p:cNvPr id="6" name="텍스트"/>
+          <p:cNvSpPr txBox="1"/>
           <p:nvPr/>
         </p:nvSpPr>
         <p:spPr>
           <a:xfrm>
-            <a:off x="2520000" y="216000"/>
-            <a:ext cx="468000" cy="468000"/>
-          </a:xfrm>
-          <a:prstGeom prst="rect">
-            <a:avLst/>
-          </a:prstGeom>
-          <a:noFill/>
-          <a:ln w="9000">
-            <a:solidFill>
-              <a:srgbClr val="3B9171"/>
-            </a:solidFill>
-            <a:prstDash val="dash"/>
-          </a:ln>
-        </p:spPr>
-        <p:txBody>
-          <a:bodyPr rtlCol="0" anchor="ctr"/>
-          <a:lstStyle/>
-          <a:p>
-            <a:pPr algn="ctr"/>
-          </a:p>
-        </p:txBody>
-      </p:sp>
-      <p:sp>
-        <p:nvSpPr>
-          <p:cNvPr id="11" name="텍스트"/>
-          <p:cNvSpPr txBox="1"/>
-          <p:nvPr/>
-        </p:nvSpPr>
-        <p:spPr>
-          <a:xfrm>
-            <a:off x="2520000" y="216000"/>
-            <a:ext cx="468000" cy="468000"/>
+            <a:off x="252000" y="1512000"/>
+            <a:ext cx="1584000" cy="123826"/>
           </a:xfrm>
           <a:prstGeom prst="rect">
             <a:avLst/>
@@ -3924,25 +3707,25 @@
           <a:noFill/>
         </p:spPr>
         <p:txBody>
-          <a:bodyPr wrap="square" lIns="0" rIns="0" tIns="0" bIns="0" anchor="ctr">
+          <a:bodyPr wrap="square" lIns="0" rIns="0" tIns="0" bIns="0" anchor="t">
             <a:spAutoFit/>
           </a:bodyPr>
           <a:lstStyle/>
           <a:p>
-            <a:pPr algn="ctr">
+            <a:pPr algn="l">
               <a:lnSpc>
-                <a:spcPts val="1305"/>
+                <a:spcPts val="942"/>
               </a:lnSpc>
             </a:pPr>
             <a:r>
-              <a:rPr sz="900" b="1">
+              <a:rPr sz="650" b="1" spc="200">
                 <a:solidFill>
-                  <a:srgbClr val="836760"/>
+                  <a:srgbClr val="6B7280"/>
                 </a:solidFill>
                 <a:latin typeface="맑은 고딕"/>
                 <a:ea typeface="맑은 고딕"/>
               </a:rPr>
-              <a:t>QR</a:t>
+              <a:t>소속 · 브랜드</a:t>
             </a:r>
           </a:p>
         </p:txBody>

--- a/public/fun/cards/expert/expert-09.pptx
+++ b/public/fun/cards/expert/expert-09.pptx
@@ -3099,19 +3099,17 @@
       <p:grpSpPr/>
       <p:sp>
         <p:nvSpPr>
-          <p:cNvPr id="2" name="Rounded Rectangle 1"/>
+          <p:cNvPr id="2" name="Oval 1"/>
           <p:cNvSpPr/>
           <p:nvPr/>
         </p:nvSpPr>
         <p:spPr>
           <a:xfrm>
-            <a:off x="252000" y="230400"/>
-            <a:ext cx="540000" cy="180000"/>
-          </a:xfrm>
-          <a:prstGeom prst="roundRect">
-            <a:avLst>
-              <a:gd name="adj" fmla="val 50000"/>
-            </a:avLst>
+            <a:off x="2658960" y="239760"/>
+            <a:ext cx="24480" cy="24480"/>
+          </a:xfrm>
+          <a:prstGeom prst="ellipse">
+            <a:avLst/>
           </a:prstGeom>
           <a:solidFill>
             <a:srgbClr val="0F9D58"/>
@@ -3130,14 +3128,596 @@
       </p:sp>
       <p:sp>
         <p:nvSpPr>
-          <p:cNvPr id="3" name="텍스트"/>
+          <p:cNvPr id="3" name="Oval 2"/>
+          <p:cNvSpPr/>
+          <p:nvPr/>
+        </p:nvSpPr>
+        <p:spPr>
+          <a:xfrm>
+            <a:off x="2658960" y="333360"/>
+            <a:ext cx="24480" cy="24480"/>
+          </a:xfrm>
+          <a:prstGeom prst="ellipse">
+            <a:avLst/>
+          </a:prstGeom>
+          <a:solidFill>
+            <a:srgbClr val="E3E5E9"/>
+          </a:solidFill>
+          <a:ln>
+            <a:noFill/>
+          </a:ln>
+        </p:spPr>
+        <p:txBody>
+          <a:bodyPr rtlCol="0" anchor="ctr"/>
+          <a:lstStyle/>
+          <a:p>
+            <a:pPr algn="ctr"/>
+          </a:p>
+        </p:txBody>
+      </p:sp>
+      <p:sp>
+        <p:nvSpPr>
+          <p:cNvPr id="4" name="Oval 3"/>
+          <p:cNvSpPr/>
+          <p:nvPr/>
+        </p:nvSpPr>
+        <p:spPr>
+          <a:xfrm>
+            <a:off x="2658960" y="426960"/>
+            <a:ext cx="24480" cy="24480"/>
+          </a:xfrm>
+          <a:prstGeom prst="ellipse">
+            <a:avLst/>
+          </a:prstGeom>
+          <a:solidFill>
+            <a:srgbClr val="E3E5E9"/>
+          </a:solidFill>
+          <a:ln>
+            <a:noFill/>
+          </a:ln>
+        </p:spPr>
+        <p:txBody>
+          <a:bodyPr rtlCol="0" anchor="ctr"/>
+          <a:lstStyle/>
+          <a:p>
+            <a:pPr algn="ctr"/>
+          </a:p>
+        </p:txBody>
+      </p:sp>
+      <p:sp>
+        <p:nvSpPr>
+          <p:cNvPr id="5" name="Oval 4"/>
+          <p:cNvSpPr/>
+          <p:nvPr/>
+        </p:nvSpPr>
+        <p:spPr>
+          <a:xfrm>
+            <a:off x="2658960" y="520560"/>
+            <a:ext cx="24480" cy="24480"/>
+          </a:xfrm>
+          <a:prstGeom prst="ellipse">
+            <a:avLst/>
+          </a:prstGeom>
+          <a:solidFill>
+            <a:srgbClr val="E3E5E9"/>
+          </a:solidFill>
+          <a:ln>
+            <a:noFill/>
+          </a:ln>
+        </p:spPr>
+        <p:txBody>
+          <a:bodyPr rtlCol="0" anchor="ctr"/>
+          <a:lstStyle/>
+          <a:p>
+            <a:pPr algn="ctr"/>
+          </a:p>
+        </p:txBody>
+      </p:sp>
+      <p:sp>
+        <p:nvSpPr>
+          <p:cNvPr id="6" name="Oval 5"/>
+          <p:cNvSpPr/>
+          <p:nvPr/>
+        </p:nvSpPr>
+        <p:spPr>
+          <a:xfrm>
+            <a:off x="2752560" y="239760"/>
+            <a:ext cx="24480" cy="24480"/>
+          </a:xfrm>
+          <a:prstGeom prst="ellipse">
+            <a:avLst/>
+          </a:prstGeom>
+          <a:solidFill>
+            <a:srgbClr val="E3E5E9"/>
+          </a:solidFill>
+          <a:ln>
+            <a:noFill/>
+          </a:ln>
+        </p:spPr>
+        <p:txBody>
+          <a:bodyPr rtlCol="0" anchor="ctr"/>
+          <a:lstStyle/>
+          <a:p>
+            <a:pPr algn="ctr"/>
+          </a:p>
+        </p:txBody>
+      </p:sp>
+      <p:sp>
+        <p:nvSpPr>
+          <p:cNvPr id="7" name="Oval 6"/>
+          <p:cNvSpPr/>
+          <p:nvPr/>
+        </p:nvSpPr>
+        <p:spPr>
+          <a:xfrm>
+            <a:off x="2752560" y="333360"/>
+            <a:ext cx="24480" cy="24480"/>
+          </a:xfrm>
+          <a:prstGeom prst="ellipse">
+            <a:avLst/>
+          </a:prstGeom>
+          <a:solidFill>
+            <a:srgbClr val="E3E5E9"/>
+          </a:solidFill>
+          <a:ln>
+            <a:noFill/>
+          </a:ln>
+        </p:spPr>
+        <p:txBody>
+          <a:bodyPr rtlCol="0" anchor="ctr"/>
+          <a:lstStyle/>
+          <a:p>
+            <a:pPr algn="ctr"/>
+          </a:p>
+        </p:txBody>
+      </p:sp>
+      <p:sp>
+        <p:nvSpPr>
+          <p:cNvPr id="8" name="Oval 7"/>
+          <p:cNvSpPr/>
+          <p:nvPr/>
+        </p:nvSpPr>
+        <p:spPr>
+          <a:xfrm>
+            <a:off x="2752560" y="426960"/>
+            <a:ext cx="24480" cy="24480"/>
+          </a:xfrm>
+          <a:prstGeom prst="ellipse">
+            <a:avLst/>
+          </a:prstGeom>
+          <a:solidFill>
+            <a:srgbClr val="E3E5E9"/>
+          </a:solidFill>
+          <a:ln>
+            <a:noFill/>
+          </a:ln>
+        </p:spPr>
+        <p:txBody>
+          <a:bodyPr rtlCol="0" anchor="ctr"/>
+          <a:lstStyle/>
+          <a:p>
+            <a:pPr algn="ctr"/>
+          </a:p>
+        </p:txBody>
+      </p:sp>
+      <p:sp>
+        <p:nvSpPr>
+          <p:cNvPr id="9" name="Oval 8"/>
+          <p:cNvSpPr/>
+          <p:nvPr/>
+        </p:nvSpPr>
+        <p:spPr>
+          <a:xfrm>
+            <a:off x="2752560" y="520560"/>
+            <a:ext cx="24480" cy="24480"/>
+          </a:xfrm>
+          <a:prstGeom prst="ellipse">
+            <a:avLst/>
+          </a:prstGeom>
+          <a:solidFill>
+            <a:srgbClr val="0F9D58"/>
+          </a:solidFill>
+          <a:ln>
+            <a:noFill/>
+          </a:ln>
+        </p:spPr>
+        <p:txBody>
+          <a:bodyPr rtlCol="0" anchor="ctr"/>
+          <a:lstStyle/>
+          <a:p>
+            <a:pPr algn="ctr"/>
+          </a:p>
+        </p:txBody>
+      </p:sp>
+      <p:sp>
+        <p:nvSpPr>
+          <p:cNvPr id="10" name="Oval 9"/>
+          <p:cNvSpPr/>
+          <p:nvPr/>
+        </p:nvSpPr>
+        <p:spPr>
+          <a:xfrm>
+            <a:off x="2846160" y="239760"/>
+            <a:ext cx="24480" cy="24480"/>
+          </a:xfrm>
+          <a:prstGeom prst="ellipse">
+            <a:avLst/>
+          </a:prstGeom>
+          <a:solidFill>
+            <a:srgbClr val="E3E5E9"/>
+          </a:solidFill>
+          <a:ln>
+            <a:noFill/>
+          </a:ln>
+        </p:spPr>
+        <p:txBody>
+          <a:bodyPr rtlCol="0" anchor="ctr"/>
+          <a:lstStyle/>
+          <a:p>
+            <a:pPr algn="ctr"/>
+          </a:p>
+        </p:txBody>
+      </p:sp>
+      <p:sp>
+        <p:nvSpPr>
+          <p:cNvPr id="11" name="Oval 10"/>
+          <p:cNvSpPr/>
+          <p:nvPr/>
+        </p:nvSpPr>
+        <p:spPr>
+          <a:xfrm>
+            <a:off x="2846160" y="333360"/>
+            <a:ext cx="24480" cy="24480"/>
+          </a:xfrm>
+          <a:prstGeom prst="ellipse">
+            <a:avLst/>
+          </a:prstGeom>
+          <a:solidFill>
+            <a:srgbClr val="E3E5E9"/>
+          </a:solidFill>
+          <a:ln>
+            <a:noFill/>
+          </a:ln>
+        </p:spPr>
+        <p:txBody>
+          <a:bodyPr rtlCol="0" anchor="ctr"/>
+          <a:lstStyle/>
+          <a:p>
+            <a:pPr algn="ctr"/>
+          </a:p>
+        </p:txBody>
+      </p:sp>
+      <p:sp>
+        <p:nvSpPr>
+          <p:cNvPr id="12" name="Oval 11"/>
+          <p:cNvSpPr/>
+          <p:nvPr/>
+        </p:nvSpPr>
+        <p:spPr>
+          <a:xfrm>
+            <a:off x="2846160" y="426960"/>
+            <a:ext cx="24480" cy="24480"/>
+          </a:xfrm>
+          <a:prstGeom prst="ellipse">
+            <a:avLst/>
+          </a:prstGeom>
+          <a:solidFill>
+            <a:srgbClr val="0F9D58"/>
+          </a:solidFill>
+          <a:ln>
+            <a:noFill/>
+          </a:ln>
+        </p:spPr>
+        <p:txBody>
+          <a:bodyPr rtlCol="0" anchor="ctr"/>
+          <a:lstStyle/>
+          <a:p>
+            <a:pPr algn="ctr"/>
+          </a:p>
+        </p:txBody>
+      </p:sp>
+      <p:sp>
+        <p:nvSpPr>
+          <p:cNvPr id="13" name="Oval 12"/>
+          <p:cNvSpPr/>
+          <p:nvPr/>
+        </p:nvSpPr>
+        <p:spPr>
+          <a:xfrm>
+            <a:off x="2846160" y="520560"/>
+            <a:ext cx="24480" cy="24480"/>
+          </a:xfrm>
+          <a:prstGeom prst="ellipse">
+            <a:avLst/>
+          </a:prstGeom>
+          <a:solidFill>
+            <a:srgbClr val="E3E5E9"/>
+          </a:solidFill>
+          <a:ln>
+            <a:noFill/>
+          </a:ln>
+        </p:spPr>
+        <p:txBody>
+          <a:bodyPr rtlCol="0" anchor="ctr"/>
+          <a:lstStyle/>
+          <a:p>
+            <a:pPr algn="ctr"/>
+          </a:p>
+        </p:txBody>
+      </p:sp>
+      <p:sp>
+        <p:nvSpPr>
+          <p:cNvPr id="14" name="Oval 13"/>
+          <p:cNvSpPr/>
+          <p:nvPr/>
+        </p:nvSpPr>
+        <p:spPr>
+          <a:xfrm>
+            <a:off x="2939760" y="239760"/>
+            <a:ext cx="24480" cy="24480"/>
+          </a:xfrm>
+          <a:prstGeom prst="ellipse">
+            <a:avLst/>
+          </a:prstGeom>
+          <a:solidFill>
+            <a:srgbClr val="E3E5E9"/>
+          </a:solidFill>
+          <a:ln>
+            <a:noFill/>
+          </a:ln>
+        </p:spPr>
+        <p:txBody>
+          <a:bodyPr rtlCol="0" anchor="ctr"/>
+          <a:lstStyle/>
+          <a:p>
+            <a:pPr algn="ctr"/>
+          </a:p>
+        </p:txBody>
+      </p:sp>
+      <p:sp>
+        <p:nvSpPr>
+          <p:cNvPr id="15" name="Oval 14"/>
+          <p:cNvSpPr/>
+          <p:nvPr/>
+        </p:nvSpPr>
+        <p:spPr>
+          <a:xfrm>
+            <a:off x="2939760" y="333360"/>
+            <a:ext cx="24480" cy="24480"/>
+          </a:xfrm>
+          <a:prstGeom prst="ellipse">
+            <a:avLst/>
+          </a:prstGeom>
+          <a:solidFill>
+            <a:srgbClr val="0F9D58"/>
+          </a:solidFill>
+          <a:ln>
+            <a:noFill/>
+          </a:ln>
+        </p:spPr>
+        <p:txBody>
+          <a:bodyPr rtlCol="0" anchor="ctr"/>
+          <a:lstStyle/>
+          <a:p>
+            <a:pPr algn="ctr"/>
+          </a:p>
+        </p:txBody>
+      </p:sp>
+      <p:sp>
+        <p:nvSpPr>
+          <p:cNvPr id="16" name="Oval 15"/>
+          <p:cNvSpPr/>
+          <p:nvPr/>
+        </p:nvSpPr>
+        <p:spPr>
+          <a:xfrm>
+            <a:off x="2939760" y="426960"/>
+            <a:ext cx="24480" cy="24480"/>
+          </a:xfrm>
+          <a:prstGeom prst="ellipse">
+            <a:avLst/>
+          </a:prstGeom>
+          <a:solidFill>
+            <a:srgbClr val="E3E5E9"/>
+          </a:solidFill>
+          <a:ln>
+            <a:noFill/>
+          </a:ln>
+        </p:spPr>
+        <p:txBody>
+          <a:bodyPr rtlCol="0" anchor="ctr"/>
+          <a:lstStyle/>
+          <a:p>
+            <a:pPr algn="ctr"/>
+          </a:p>
+        </p:txBody>
+      </p:sp>
+      <p:sp>
+        <p:nvSpPr>
+          <p:cNvPr id="17" name="Oval 16"/>
+          <p:cNvSpPr/>
+          <p:nvPr/>
+        </p:nvSpPr>
+        <p:spPr>
+          <a:xfrm>
+            <a:off x="2939760" y="520560"/>
+            <a:ext cx="24480" cy="24480"/>
+          </a:xfrm>
+          <a:prstGeom prst="ellipse">
+            <a:avLst/>
+          </a:prstGeom>
+          <a:solidFill>
+            <a:srgbClr val="E3E5E9"/>
+          </a:solidFill>
+          <a:ln>
+            <a:noFill/>
+          </a:ln>
+        </p:spPr>
+        <p:txBody>
+          <a:bodyPr rtlCol="0" anchor="ctr"/>
+          <a:lstStyle/>
+          <a:p>
+            <a:pPr algn="ctr"/>
+          </a:p>
+        </p:txBody>
+      </p:sp>
+      <p:sp>
+        <p:nvSpPr>
+          <p:cNvPr id="18" name="Oval 17"/>
+          <p:cNvSpPr/>
+          <p:nvPr/>
+        </p:nvSpPr>
+        <p:spPr>
+          <a:xfrm>
+            <a:off x="3033360" y="239760"/>
+            <a:ext cx="24480" cy="24480"/>
+          </a:xfrm>
+          <a:prstGeom prst="ellipse">
+            <a:avLst/>
+          </a:prstGeom>
+          <a:solidFill>
+            <a:srgbClr val="0F9D58"/>
+          </a:solidFill>
+          <a:ln>
+            <a:noFill/>
+          </a:ln>
+        </p:spPr>
+        <p:txBody>
+          <a:bodyPr rtlCol="0" anchor="ctr"/>
+          <a:lstStyle/>
+          <a:p>
+            <a:pPr algn="ctr"/>
+          </a:p>
+        </p:txBody>
+      </p:sp>
+      <p:sp>
+        <p:nvSpPr>
+          <p:cNvPr id="19" name="Oval 18"/>
+          <p:cNvSpPr/>
+          <p:nvPr/>
+        </p:nvSpPr>
+        <p:spPr>
+          <a:xfrm>
+            <a:off x="3033360" y="333360"/>
+            <a:ext cx="24480" cy="24480"/>
+          </a:xfrm>
+          <a:prstGeom prst="ellipse">
+            <a:avLst/>
+          </a:prstGeom>
+          <a:solidFill>
+            <a:srgbClr val="E3E5E9"/>
+          </a:solidFill>
+          <a:ln>
+            <a:noFill/>
+          </a:ln>
+        </p:spPr>
+        <p:txBody>
+          <a:bodyPr rtlCol="0" anchor="ctr"/>
+          <a:lstStyle/>
+          <a:p>
+            <a:pPr algn="ctr"/>
+          </a:p>
+        </p:txBody>
+      </p:sp>
+      <p:sp>
+        <p:nvSpPr>
+          <p:cNvPr id="20" name="Oval 19"/>
+          <p:cNvSpPr/>
+          <p:nvPr/>
+        </p:nvSpPr>
+        <p:spPr>
+          <a:xfrm>
+            <a:off x="3033360" y="426960"/>
+            <a:ext cx="24480" cy="24480"/>
+          </a:xfrm>
+          <a:prstGeom prst="ellipse">
+            <a:avLst/>
+          </a:prstGeom>
+          <a:solidFill>
+            <a:srgbClr val="E3E5E9"/>
+          </a:solidFill>
+          <a:ln>
+            <a:noFill/>
+          </a:ln>
+        </p:spPr>
+        <p:txBody>
+          <a:bodyPr rtlCol="0" anchor="ctr"/>
+          <a:lstStyle/>
+          <a:p>
+            <a:pPr algn="ctr"/>
+          </a:p>
+        </p:txBody>
+      </p:sp>
+      <p:sp>
+        <p:nvSpPr>
+          <p:cNvPr id="21" name="Oval 20"/>
+          <p:cNvSpPr/>
+          <p:nvPr/>
+        </p:nvSpPr>
+        <p:spPr>
+          <a:xfrm>
+            <a:off x="3033360" y="520560"/>
+            <a:ext cx="24480" cy="24480"/>
+          </a:xfrm>
+          <a:prstGeom prst="ellipse">
+            <a:avLst/>
+          </a:prstGeom>
+          <a:solidFill>
+            <a:srgbClr val="E3E5E9"/>
+          </a:solidFill>
+          <a:ln>
+            <a:noFill/>
+          </a:ln>
+        </p:spPr>
+        <p:txBody>
+          <a:bodyPr rtlCol="0" anchor="ctr"/>
+          <a:lstStyle/>
+          <a:p>
+            <a:pPr algn="ctr"/>
+          </a:p>
+        </p:txBody>
+      </p:sp>
+      <p:sp>
+        <p:nvSpPr>
+          <p:cNvPr id="22" name="Rounded Rectangle 21"/>
+          <p:cNvSpPr/>
+          <p:nvPr/>
+        </p:nvSpPr>
+        <p:spPr>
+          <a:xfrm>
+            <a:off x="252000" y="237600"/>
+            <a:ext cx="540000" cy="165600"/>
+          </a:xfrm>
+          <a:prstGeom prst="roundRect">
+            <a:avLst>
+              <a:gd name="adj" fmla="val 50000"/>
+            </a:avLst>
+          </a:prstGeom>
+          <a:noFill/>
+          <a:ln w="5760">
+            <a:solidFill>
+              <a:srgbClr val="0F9D58"/>
+            </a:solidFill>
+          </a:ln>
+        </p:spPr>
+        <p:txBody>
+          <a:bodyPr rtlCol="0" anchor="ctr"/>
+          <a:lstStyle/>
+          <a:p>
+            <a:pPr algn="ctr"/>
+          </a:p>
+        </p:txBody>
+      </p:sp>
+      <p:sp>
+        <p:nvSpPr>
+          <p:cNvPr id="23" name="텍스트"/>
           <p:cNvSpPr txBox="1"/>
           <p:nvPr/>
         </p:nvSpPr>
         <p:spPr>
           <a:xfrm>
-            <a:off x="252000" y="230400"/>
-            <a:ext cx="540000" cy="180000"/>
+            <a:off x="252000" y="237600"/>
+            <a:ext cx="540000" cy="165600"/>
           </a:xfrm>
           <a:prstGeom prst="rect">
             <a:avLst/>
@@ -3152,13 +3732,13 @@
           <a:p>
             <a:pPr algn="ctr">
               <a:lnSpc>
-                <a:spcPts val="1160"/>
+                <a:spcPts val="956"/>
               </a:lnSpc>
             </a:pPr>
             <a:r>
-              <a:rPr sz="800" b="1">
+              <a:rPr sz="660" b="1" spc="80">
                 <a:solidFill>
-                  <a:srgbClr val="FFFFFF"/>
+                  <a:srgbClr val="12151C"/>
                 </a:solidFill>
                 <a:latin typeface="맑은 고딕"/>
                 <a:ea typeface="맑은 고딕"/>
@@ -3170,14 +3750,14 @@
       </p:sp>
       <p:sp>
         <p:nvSpPr>
-          <p:cNvPr id="4" name="텍스트"/>
+          <p:cNvPr id="24" name="텍스트"/>
           <p:cNvSpPr txBox="1"/>
           <p:nvPr/>
         </p:nvSpPr>
         <p:spPr>
           <a:xfrm>
-            <a:off x="252000" y="568800"/>
-            <a:ext cx="2520000" cy="396000"/>
+            <a:off x="252000" y="583200"/>
+            <a:ext cx="2160000" cy="237600"/>
           </a:xfrm>
           <a:prstGeom prst="rect">
             <a:avLst/>
@@ -3192,11 +3772,11 @@
           <a:p>
             <a:pPr algn="l">
               <a:lnSpc>
-                <a:spcPts val="3479"/>
+                <a:spcPts val="1957"/>
               </a:lnSpc>
             </a:pPr>
             <a:r>
-              <a:rPr sz="2400" b="1">
+              <a:rPr sz="1350" b="1" spc="120">
                 <a:solidFill>
                   <a:srgbClr val="12151C"/>
                 </a:solidFill>
@@ -3210,14 +3790,14 @@
       </p:sp>
       <p:sp>
         <p:nvSpPr>
-          <p:cNvPr id="5" name="텍스트"/>
+          <p:cNvPr id="25" name="텍스트"/>
           <p:cNvSpPr txBox="1"/>
           <p:nvPr/>
         </p:nvSpPr>
         <p:spPr>
           <a:xfrm>
-            <a:off x="252000" y="993600"/>
-            <a:ext cx="2160000" cy="152401"/>
+            <a:off x="252000" y="878400"/>
+            <a:ext cx="1800000" cy="123826"/>
           </a:xfrm>
           <a:prstGeom prst="rect">
             <a:avLst/>
@@ -3232,11 +3812,11 @@
           <a:p>
             <a:pPr algn="l">
               <a:lnSpc>
-                <a:spcPts val="1160"/>
+                <a:spcPts val="942"/>
               </a:lnSpc>
             </a:pPr>
             <a:r>
-              <a:rPr sz="800" b="0">
+              <a:rPr sz="650" b="1" spc="220">
                 <a:solidFill>
                   <a:srgbClr val="6B7280"/>
                 </a:solidFill>
@@ -3250,19 +3830,19 @@
       </p:sp>
       <p:cxnSp>
         <p:nvCxnSpPr>
-          <p:cNvPr id="6" name="Connector 5"/>
+          <p:cNvPr id="26" name="Connector 25"/>
           <p:cNvCxnSpPr/>
           <p:nvPr/>
         </p:nvCxnSpPr>
         <p:spPr>
           <a:xfrm>
-            <a:off x="252000" y="1209600"/>
+            <a:off x="252000" y="1144800"/>
             <a:ext cx="2736000" cy="0"/>
           </a:xfrm>
           <a:prstGeom prst="line">
             <a:avLst/>
           </a:prstGeom>
-          <a:ln w="5760">
+          <a:ln w="3600">
             <a:solidFill>
               <a:srgbClr val="E3E5E9"/>
             </a:solidFill>
@@ -3271,14 +3851,14 @@
       </p:cxnSp>
       <p:sp>
         <p:nvSpPr>
-          <p:cNvPr id="7" name="텍스트"/>
+          <p:cNvPr id="27" name="텍스트"/>
           <p:cNvSpPr txBox="1"/>
           <p:nvPr/>
         </p:nvSpPr>
         <p:spPr>
           <a:xfrm>
-            <a:off x="252000" y="1299600"/>
-            <a:ext cx="331200" cy="99061"/>
+            <a:off x="252000" y="1242000"/>
+            <a:ext cx="331200" cy="91441"/>
           </a:xfrm>
           <a:prstGeom prst="rect">
             <a:avLst/>
@@ -3293,11 +3873,11 @@
           <a:p>
             <a:pPr algn="l">
               <a:lnSpc>
-                <a:spcPts val="754"/>
+                <a:spcPts val="696"/>
               </a:lnSpc>
             </a:pPr>
             <a:r>
-              <a:rPr sz="520" b="1" spc="120">
+              <a:rPr sz="480" b="1" spc="140">
                 <a:solidFill>
                   <a:srgbClr val="6B7280"/>
                 </a:solidFill>
@@ -3311,14 +3891,14 @@
       </p:sp>
       <p:sp>
         <p:nvSpPr>
-          <p:cNvPr id="8" name="텍스트"/>
+          <p:cNvPr id="28" name="텍스트"/>
           <p:cNvSpPr txBox="1"/>
           <p:nvPr/>
         </p:nvSpPr>
         <p:spPr>
           <a:xfrm>
-            <a:off x="583200" y="1288800"/>
-            <a:ext cx="1512000" cy="129541"/>
+            <a:off x="583200" y="1231200"/>
+            <a:ext cx="1512000" cy="123826"/>
           </a:xfrm>
           <a:prstGeom prst="rect">
             <a:avLst/>
@@ -3333,11 +3913,11 @@
           <a:p>
             <a:pPr algn="l">
               <a:lnSpc>
-                <a:spcPts val="986"/>
+                <a:spcPts val="942"/>
               </a:lnSpc>
             </a:pPr>
             <a:r>
-              <a:rPr sz="680" b="0">
+              <a:rPr sz="650" b="0">
                 <a:solidFill>
                   <a:srgbClr val="12151C"/>
                 </a:solidFill>
@@ -3351,14 +3931,14 @@
       </p:sp>
       <p:sp>
         <p:nvSpPr>
-          <p:cNvPr id="9" name="텍스트"/>
+          <p:cNvPr id="29" name="텍스트"/>
           <p:cNvSpPr txBox="1"/>
           <p:nvPr/>
         </p:nvSpPr>
         <p:spPr>
           <a:xfrm>
-            <a:off x="252000" y="1429200"/>
-            <a:ext cx="331200" cy="99061"/>
+            <a:off x="252000" y="1371600"/>
+            <a:ext cx="331200" cy="91441"/>
           </a:xfrm>
           <a:prstGeom prst="rect">
             <a:avLst/>
@@ -3373,11 +3953,11 @@
           <a:p>
             <a:pPr algn="l">
               <a:lnSpc>
-                <a:spcPts val="754"/>
+                <a:spcPts val="696"/>
               </a:lnSpc>
             </a:pPr>
             <a:r>
-              <a:rPr sz="520" b="1" spc="120">
+              <a:rPr sz="480" b="1" spc="140">
                 <a:solidFill>
                   <a:srgbClr val="6B7280"/>
                 </a:solidFill>
@@ -3391,14 +3971,14 @@
       </p:sp>
       <p:sp>
         <p:nvSpPr>
-          <p:cNvPr id="10" name="텍스트"/>
+          <p:cNvPr id="30" name="텍스트"/>
           <p:cNvSpPr txBox="1"/>
           <p:nvPr/>
         </p:nvSpPr>
         <p:spPr>
           <a:xfrm>
-            <a:off x="583200" y="1418400"/>
-            <a:ext cx="1512000" cy="129541"/>
+            <a:off x="583200" y="1360800"/>
+            <a:ext cx="1512000" cy="123826"/>
           </a:xfrm>
           <a:prstGeom prst="rect">
             <a:avLst/>
@@ -3413,11 +3993,11 @@
           <a:p>
             <a:pPr algn="l">
               <a:lnSpc>
-                <a:spcPts val="986"/>
+                <a:spcPts val="942"/>
               </a:lnSpc>
             </a:pPr>
             <a:r>
-              <a:rPr sz="680" b="0">
+              <a:rPr sz="650" b="0">
                 <a:solidFill>
                   <a:srgbClr val="12151C"/>
                 </a:solidFill>
@@ -3431,14 +4011,14 @@
       </p:sp>
       <p:sp>
         <p:nvSpPr>
-          <p:cNvPr id="11" name="텍스트"/>
+          <p:cNvPr id="31" name="텍스트"/>
           <p:cNvSpPr txBox="1"/>
           <p:nvPr/>
         </p:nvSpPr>
         <p:spPr>
           <a:xfrm>
-            <a:off x="252000" y="1558800"/>
-            <a:ext cx="331200" cy="99061"/>
+            <a:off x="252000" y="1501200"/>
+            <a:ext cx="331200" cy="91441"/>
           </a:xfrm>
           <a:prstGeom prst="rect">
             <a:avLst/>
@@ -3453,11 +4033,11 @@
           <a:p>
             <a:pPr algn="l">
               <a:lnSpc>
-                <a:spcPts val="754"/>
+                <a:spcPts val="696"/>
               </a:lnSpc>
             </a:pPr>
             <a:r>
-              <a:rPr sz="520" b="1" spc="120">
+              <a:rPr sz="480" b="1" spc="140">
                 <a:solidFill>
                   <a:srgbClr val="6B7280"/>
                 </a:solidFill>
@@ -3471,14 +4051,14 @@
       </p:sp>
       <p:sp>
         <p:nvSpPr>
-          <p:cNvPr id="12" name="텍스트"/>
+          <p:cNvPr id="32" name="텍스트"/>
           <p:cNvSpPr txBox="1"/>
           <p:nvPr/>
         </p:nvSpPr>
         <p:spPr>
           <a:xfrm>
-            <a:off x="583200" y="1548000"/>
-            <a:ext cx="1512000" cy="129541"/>
+            <a:off x="583200" y="1490400"/>
+            <a:ext cx="1512000" cy="123826"/>
           </a:xfrm>
           <a:prstGeom prst="rect">
             <a:avLst/>
@@ -3493,11 +4073,11 @@
           <a:p>
             <a:pPr algn="l">
               <a:lnSpc>
-                <a:spcPts val="986"/>
+                <a:spcPts val="942"/>
               </a:lnSpc>
             </a:pPr>
             <a:r>
-              <a:rPr sz="680" b="0">
+              <a:rPr sz="650" b="0">
                 <a:solidFill>
                   <a:srgbClr val="12151C"/>
                 </a:solidFill>
@@ -3509,6 +4089,48 @@
           </a:p>
         </p:txBody>
       </p:sp>
+      <p:cxnSp>
+        <p:nvCxnSpPr>
+          <p:cNvPr id="33" name="Connector 32"/>
+          <p:cNvCxnSpPr/>
+          <p:nvPr/>
+        </p:nvCxnSpPr>
+        <p:spPr>
+          <a:xfrm>
+            <a:off x="2955600" y="1584000"/>
+            <a:ext cx="64800" cy="0"/>
+          </a:xfrm>
+          <a:prstGeom prst="line">
+            <a:avLst/>
+          </a:prstGeom>
+          <a:ln w="3600">
+            <a:solidFill>
+              <a:srgbClr val="E3E5E9"/>
+            </a:solidFill>
+          </a:ln>
+        </p:spPr>
+      </p:cxnSp>
+      <p:cxnSp>
+        <p:nvCxnSpPr>
+          <p:cNvPr id="34" name="Connector 33"/>
+          <p:cNvCxnSpPr/>
+          <p:nvPr/>
+        </p:nvCxnSpPr>
+        <p:spPr>
+          <a:xfrm>
+            <a:off x="2988000" y="1551600"/>
+            <a:ext cx="0" cy="64800"/>
+          </a:xfrm>
+          <a:prstGeom prst="line">
+            <a:avLst/>
+          </a:prstGeom>
+          <a:ln w="3600">
+            <a:solidFill>
+              <a:srgbClr val="E3E5E9"/>
+            </a:solidFill>
+          </a:ln>
+        </p:spPr>
+      </p:cxnSp>
     </p:spTree>
   </p:cSld>
   <p:clrMapOvr>
@@ -3543,8 +4165,8 @@
         </p:nvSpPr>
         <p:spPr>
           <a:xfrm>
-            <a:off x="2088000" y="0"/>
-            <a:ext cx="1152000" cy="1800000"/>
+            <a:off x="0" y="0"/>
+            <a:ext cx="1188000" cy="1800000"/>
           </a:xfrm>
           <a:prstGeom prst="rect">
             <a:avLst/>
@@ -3564,27 +4186,657 @@
           </a:p>
         </p:txBody>
       </p:sp>
-      <p:sp>
-        <p:nvSpPr>
-          <p:cNvPr id="3" name="Oval 2"/>
-          <p:cNvSpPr/>
-          <p:nvPr/>
-        </p:nvSpPr>
-        <p:spPr>
-          <a:xfrm>
-            <a:off x="2397600" y="633600"/>
-            <a:ext cx="532800" cy="532800"/>
-          </a:xfrm>
-          <a:prstGeom prst="ellipse">
-            <a:avLst/>
-          </a:prstGeom>
-          <a:noFill/>
-          <a:ln w="10800">
+      <p:cxnSp>
+        <p:nvCxnSpPr>
+          <p:cNvPr id="3" name="Connector 2"/>
+          <p:cNvCxnSpPr/>
+          <p:nvPr/>
+        </p:nvCxnSpPr>
+        <p:spPr>
+          <a:xfrm flipV="1">
+            <a:off x="0" y="1224000"/>
+            <a:ext cx="57600" cy="57600"/>
+          </a:xfrm>
+          <a:prstGeom prst="line">
+            <a:avLst/>
+          </a:prstGeom>
+          <a:ln w="3600">
             <a:solidFill>
               <a:srgbClr val="FFFFFF"/>
             </a:solidFill>
           </a:ln>
         </p:spPr>
+      </p:cxnSp>
+      <p:cxnSp>
+        <p:nvCxnSpPr>
+          <p:cNvPr id="4" name="Connector 3"/>
+          <p:cNvCxnSpPr/>
+          <p:nvPr/>
+        </p:nvCxnSpPr>
+        <p:spPr>
+          <a:xfrm flipV="1">
+            <a:off x="0" y="1224000"/>
+            <a:ext cx="115200" cy="115200"/>
+          </a:xfrm>
+          <a:prstGeom prst="line">
+            <a:avLst/>
+          </a:prstGeom>
+          <a:ln w="3600">
+            <a:solidFill>
+              <a:srgbClr val="FFFFFF"/>
+            </a:solidFill>
+          </a:ln>
+        </p:spPr>
+      </p:cxnSp>
+      <p:cxnSp>
+        <p:nvCxnSpPr>
+          <p:cNvPr id="5" name="Connector 4"/>
+          <p:cNvCxnSpPr/>
+          <p:nvPr/>
+        </p:nvCxnSpPr>
+        <p:spPr>
+          <a:xfrm flipV="1">
+            <a:off x="0" y="1224000"/>
+            <a:ext cx="172800" cy="172800"/>
+          </a:xfrm>
+          <a:prstGeom prst="line">
+            <a:avLst/>
+          </a:prstGeom>
+          <a:ln w="3600">
+            <a:solidFill>
+              <a:srgbClr val="FFFFFF"/>
+            </a:solidFill>
+          </a:ln>
+        </p:spPr>
+      </p:cxnSp>
+      <p:cxnSp>
+        <p:nvCxnSpPr>
+          <p:cNvPr id="6" name="Connector 5"/>
+          <p:cNvCxnSpPr/>
+          <p:nvPr/>
+        </p:nvCxnSpPr>
+        <p:spPr>
+          <a:xfrm flipV="1">
+            <a:off x="0" y="1224000"/>
+            <a:ext cx="230400" cy="230400"/>
+          </a:xfrm>
+          <a:prstGeom prst="line">
+            <a:avLst/>
+          </a:prstGeom>
+          <a:ln w="3600">
+            <a:solidFill>
+              <a:srgbClr val="FFFFFF"/>
+            </a:solidFill>
+          </a:ln>
+        </p:spPr>
+      </p:cxnSp>
+      <p:cxnSp>
+        <p:nvCxnSpPr>
+          <p:cNvPr id="7" name="Connector 6"/>
+          <p:cNvCxnSpPr/>
+          <p:nvPr/>
+        </p:nvCxnSpPr>
+        <p:spPr>
+          <a:xfrm flipV="1">
+            <a:off x="0" y="1224000"/>
+            <a:ext cx="288000" cy="288000"/>
+          </a:xfrm>
+          <a:prstGeom prst="line">
+            <a:avLst/>
+          </a:prstGeom>
+          <a:ln w="3600">
+            <a:solidFill>
+              <a:srgbClr val="FFFFFF"/>
+            </a:solidFill>
+          </a:ln>
+        </p:spPr>
+      </p:cxnSp>
+      <p:cxnSp>
+        <p:nvCxnSpPr>
+          <p:cNvPr id="8" name="Connector 7"/>
+          <p:cNvCxnSpPr/>
+          <p:nvPr/>
+        </p:nvCxnSpPr>
+        <p:spPr>
+          <a:xfrm flipV="1">
+            <a:off x="0" y="1224000"/>
+            <a:ext cx="345600" cy="345600"/>
+          </a:xfrm>
+          <a:prstGeom prst="line">
+            <a:avLst/>
+          </a:prstGeom>
+          <a:ln w="3600">
+            <a:solidFill>
+              <a:srgbClr val="FFFFFF"/>
+            </a:solidFill>
+          </a:ln>
+        </p:spPr>
+      </p:cxnSp>
+      <p:cxnSp>
+        <p:nvCxnSpPr>
+          <p:cNvPr id="9" name="Connector 8"/>
+          <p:cNvCxnSpPr/>
+          <p:nvPr/>
+        </p:nvCxnSpPr>
+        <p:spPr>
+          <a:xfrm flipV="1">
+            <a:off x="0" y="1224000"/>
+            <a:ext cx="403200" cy="403200"/>
+          </a:xfrm>
+          <a:prstGeom prst="line">
+            <a:avLst/>
+          </a:prstGeom>
+          <a:ln w="3600">
+            <a:solidFill>
+              <a:srgbClr val="FFFFFF"/>
+            </a:solidFill>
+          </a:ln>
+        </p:spPr>
+      </p:cxnSp>
+      <p:cxnSp>
+        <p:nvCxnSpPr>
+          <p:cNvPr id="10" name="Connector 9"/>
+          <p:cNvCxnSpPr/>
+          <p:nvPr/>
+        </p:nvCxnSpPr>
+        <p:spPr>
+          <a:xfrm flipV="1">
+            <a:off x="0" y="1224000"/>
+            <a:ext cx="460800" cy="460800"/>
+          </a:xfrm>
+          <a:prstGeom prst="line">
+            <a:avLst/>
+          </a:prstGeom>
+          <a:ln w="3600">
+            <a:solidFill>
+              <a:srgbClr val="FFFFFF"/>
+            </a:solidFill>
+          </a:ln>
+        </p:spPr>
+      </p:cxnSp>
+      <p:cxnSp>
+        <p:nvCxnSpPr>
+          <p:cNvPr id="11" name="Connector 10"/>
+          <p:cNvCxnSpPr/>
+          <p:nvPr/>
+        </p:nvCxnSpPr>
+        <p:spPr>
+          <a:xfrm flipV="1">
+            <a:off x="0" y="1224000"/>
+            <a:ext cx="518400" cy="518400"/>
+          </a:xfrm>
+          <a:prstGeom prst="line">
+            <a:avLst/>
+          </a:prstGeom>
+          <a:ln w="3600">
+            <a:solidFill>
+              <a:srgbClr val="FFFFFF"/>
+            </a:solidFill>
+          </a:ln>
+        </p:spPr>
+      </p:cxnSp>
+      <p:cxnSp>
+        <p:nvCxnSpPr>
+          <p:cNvPr id="12" name="Connector 11"/>
+          <p:cNvCxnSpPr/>
+          <p:nvPr/>
+        </p:nvCxnSpPr>
+        <p:spPr>
+          <a:xfrm flipV="1">
+            <a:off x="0" y="1224000"/>
+            <a:ext cx="576000" cy="576000"/>
+          </a:xfrm>
+          <a:prstGeom prst="line">
+            <a:avLst/>
+          </a:prstGeom>
+          <a:ln w="3600">
+            <a:solidFill>
+              <a:srgbClr val="FFFFFF"/>
+            </a:solidFill>
+          </a:ln>
+        </p:spPr>
+      </p:cxnSp>
+      <p:cxnSp>
+        <p:nvCxnSpPr>
+          <p:cNvPr id="13" name="Connector 12"/>
+          <p:cNvCxnSpPr/>
+          <p:nvPr/>
+        </p:nvCxnSpPr>
+        <p:spPr>
+          <a:xfrm flipV="1">
+            <a:off x="57600" y="1224000"/>
+            <a:ext cx="576000" cy="576000"/>
+          </a:xfrm>
+          <a:prstGeom prst="line">
+            <a:avLst/>
+          </a:prstGeom>
+          <a:ln w="3600">
+            <a:solidFill>
+              <a:srgbClr val="FFFFFF"/>
+            </a:solidFill>
+          </a:ln>
+        </p:spPr>
+      </p:cxnSp>
+      <p:cxnSp>
+        <p:nvCxnSpPr>
+          <p:cNvPr id="14" name="Connector 13"/>
+          <p:cNvCxnSpPr/>
+          <p:nvPr/>
+        </p:nvCxnSpPr>
+        <p:spPr>
+          <a:xfrm flipV="1">
+            <a:off x="115200" y="1224000"/>
+            <a:ext cx="576000" cy="576000"/>
+          </a:xfrm>
+          <a:prstGeom prst="line">
+            <a:avLst/>
+          </a:prstGeom>
+          <a:ln w="3600">
+            <a:solidFill>
+              <a:srgbClr val="FFFFFF"/>
+            </a:solidFill>
+          </a:ln>
+        </p:spPr>
+      </p:cxnSp>
+      <p:cxnSp>
+        <p:nvCxnSpPr>
+          <p:cNvPr id="15" name="Connector 14"/>
+          <p:cNvCxnSpPr/>
+          <p:nvPr/>
+        </p:nvCxnSpPr>
+        <p:spPr>
+          <a:xfrm flipV="1">
+            <a:off x="172800" y="1224000"/>
+            <a:ext cx="576000" cy="576000"/>
+          </a:xfrm>
+          <a:prstGeom prst="line">
+            <a:avLst/>
+          </a:prstGeom>
+          <a:ln w="3600">
+            <a:solidFill>
+              <a:srgbClr val="FFFFFF"/>
+            </a:solidFill>
+          </a:ln>
+        </p:spPr>
+      </p:cxnSp>
+      <p:cxnSp>
+        <p:nvCxnSpPr>
+          <p:cNvPr id="16" name="Connector 15"/>
+          <p:cNvCxnSpPr/>
+          <p:nvPr/>
+        </p:nvCxnSpPr>
+        <p:spPr>
+          <a:xfrm flipV="1">
+            <a:off x="230400" y="1224000"/>
+            <a:ext cx="576000" cy="576000"/>
+          </a:xfrm>
+          <a:prstGeom prst="line">
+            <a:avLst/>
+          </a:prstGeom>
+          <a:ln w="3600">
+            <a:solidFill>
+              <a:srgbClr val="FFFFFF"/>
+            </a:solidFill>
+          </a:ln>
+        </p:spPr>
+      </p:cxnSp>
+      <p:cxnSp>
+        <p:nvCxnSpPr>
+          <p:cNvPr id="17" name="Connector 16"/>
+          <p:cNvCxnSpPr/>
+          <p:nvPr/>
+        </p:nvCxnSpPr>
+        <p:spPr>
+          <a:xfrm flipV="1">
+            <a:off x="288000" y="1224000"/>
+            <a:ext cx="576000" cy="576000"/>
+          </a:xfrm>
+          <a:prstGeom prst="line">
+            <a:avLst/>
+          </a:prstGeom>
+          <a:ln w="3600">
+            <a:solidFill>
+              <a:srgbClr val="FFFFFF"/>
+            </a:solidFill>
+          </a:ln>
+        </p:spPr>
+      </p:cxnSp>
+      <p:cxnSp>
+        <p:nvCxnSpPr>
+          <p:cNvPr id="18" name="Connector 17"/>
+          <p:cNvCxnSpPr/>
+          <p:nvPr/>
+        </p:nvCxnSpPr>
+        <p:spPr>
+          <a:xfrm flipV="1">
+            <a:off x="345600" y="1224000"/>
+            <a:ext cx="576000" cy="576000"/>
+          </a:xfrm>
+          <a:prstGeom prst="line">
+            <a:avLst/>
+          </a:prstGeom>
+          <a:ln w="3600">
+            <a:solidFill>
+              <a:srgbClr val="FFFFFF"/>
+            </a:solidFill>
+          </a:ln>
+        </p:spPr>
+      </p:cxnSp>
+      <p:cxnSp>
+        <p:nvCxnSpPr>
+          <p:cNvPr id="19" name="Connector 18"/>
+          <p:cNvCxnSpPr/>
+          <p:nvPr/>
+        </p:nvCxnSpPr>
+        <p:spPr>
+          <a:xfrm flipV="1">
+            <a:off x="403200" y="1224000"/>
+            <a:ext cx="576000" cy="576000"/>
+          </a:xfrm>
+          <a:prstGeom prst="line">
+            <a:avLst/>
+          </a:prstGeom>
+          <a:ln w="3600">
+            <a:solidFill>
+              <a:srgbClr val="FFFFFF"/>
+            </a:solidFill>
+          </a:ln>
+        </p:spPr>
+      </p:cxnSp>
+      <p:cxnSp>
+        <p:nvCxnSpPr>
+          <p:cNvPr id="20" name="Connector 19"/>
+          <p:cNvCxnSpPr/>
+          <p:nvPr/>
+        </p:nvCxnSpPr>
+        <p:spPr>
+          <a:xfrm flipV="1">
+            <a:off x="460800" y="1224000"/>
+            <a:ext cx="576000" cy="576000"/>
+          </a:xfrm>
+          <a:prstGeom prst="line">
+            <a:avLst/>
+          </a:prstGeom>
+          <a:ln w="3600">
+            <a:solidFill>
+              <a:srgbClr val="FFFFFF"/>
+            </a:solidFill>
+          </a:ln>
+        </p:spPr>
+      </p:cxnSp>
+      <p:cxnSp>
+        <p:nvCxnSpPr>
+          <p:cNvPr id="21" name="Connector 20"/>
+          <p:cNvCxnSpPr/>
+          <p:nvPr/>
+        </p:nvCxnSpPr>
+        <p:spPr>
+          <a:xfrm flipV="1">
+            <a:off x="518400" y="1224000"/>
+            <a:ext cx="576000" cy="576000"/>
+          </a:xfrm>
+          <a:prstGeom prst="line">
+            <a:avLst/>
+          </a:prstGeom>
+          <a:ln w="3600">
+            <a:solidFill>
+              <a:srgbClr val="FFFFFF"/>
+            </a:solidFill>
+          </a:ln>
+        </p:spPr>
+      </p:cxnSp>
+      <p:cxnSp>
+        <p:nvCxnSpPr>
+          <p:cNvPr id="22" name="Connector 21"/>
+          <p:cNvCxnSpPr/>
+          <p:nvPr/>
+        </p:nvCxnSpPr>
+        <p:spPr>
+          <a:xfrm flipV="1">
+            <a:off x="576000" y="1224000"/>
+            <a:ext cx="576000" cy="576000"/>
+          </a:xfrm>
+          <a:prstGeom prst="line">
+            <a:avLst/>
+          </a:prstGeom>
+          <a:ln w="3600">
+            <a:solidFill>
+              <a:srgbClr val="FFFFFF"/>
+            </a:solidFill>
+          </a:ln>
+        </p:spPr>
+      </p:cxnSp>
+      <p:cxnSp>
+        <p:nvCxnSpPr>
+          <p:cNvPr id="23" name="Connector 22"/>
+          <p:cNvCxnSpPr/>
+          <p:nvPr/>
+        </p:nvCxnSpPr>
+        <p:spPr>
+          <a:xfrm flipV="1">
+            <a:off x="633600" y="1245600"/>
+            <a:ext cx="554400" cy="554400"/>
+          </a:xfrm>
+          <a:prstGeom prst="line">
+            <a:avLst/>
+          </a:prstGeom>
+          <a:ln w="3600">
+            <a:solidFill>
+              <a:srgbClr val="FFFFFF"/>
+            </a:solidFill>
+          </a:ln>
+        </p:spPr>
+      </p:cxnSp>
+      <p:cxnSp>
+        <p:nvCxnSpPr>
+          <p:cNvPr id="24" name="Connector 23"/>
+          <p:cNvCxnSpPr/>
+          <p:nvPr/>
+        </p:nvCxnSpPr>
+        <p:spPr>
+          <a:xfrm flipV="1">
+            <a:off x="691200" y="1303200"/>
+            <a:ext cx="496800" cy="496800"/>
+          </a:xfrm>
+          <a:prstGeom prst="line">
+            <a:avLst/>
+          </a:prstGeom>
+          <a:ln w="3600">
+            <a:solidFill>
+              <a:srgbClr val="FFFFFF"/>
+            </a:solidFill>
+          </a:ln>
+        </p:spPr>
+      </p:cxnSp>
+      <p:cxnSp>
+        <p:nvCxnSpPr>
+          <p:cNvPr id="25" name="Connector 24"/>
+          <p:cNvCxnSpPr/>
+          <p:nvPr/>
+        </p:nvCxnSpPr>
+        <p:spPr>
+          <a:xfrm flipV="1">
+            <a:off x="748800" y="1360800"/>
+            <a:ext cx="439200" cy="439200"/>
+          </a:xfrm>
+          <a:prstGeom prst="line">
+            <a:avLst/>
+          </a:prstGeom>
+          <a:ln w="3600">
+            <a:solidFill>
+              <a:srgbClr val="FFFFFF"/>
+            </a:solidFill>
+          </a:ln>
+        </p:spPr>
+      </p:cxnSp>
+      <p:cxnSp>
+        <p:nvCxnSpPr>
+          <p:cNvPr id="26" name="Connector 25"/>
+          <p:cNvCxnSpPr/>
+          <p:nvPr/>
+        </p:nvCxnSpPr>
+        <p:spPr>
+          <a:xfrm flipV="1">
+            <a:off x="806400" y="1418400"/>
+            <a:ext cx="381600" cy="381600"/>
+          </a:xfrm>
+          <a:prstGeom prst="line">
+            <a:avLst/>
+          </a:prstGeom>
+          <a:ln w="3600">
+            <a:solidFill>
+              <a:srgbClr val="FFFFFF"/>
+            </a:solidFill>
+          </a:ln>
+        </p:spPr>
+      </p:cxnSp>
+      <p:cxnSp>
+        <p:nvCxnSpPr>
+          <p:cNvPr id="27" name="Connector 26"/>
+          <p:cNvCxnSpPr/>
+          <p:nvPr/>
+        </p:nvCxnSpPr>
+        <p:spPr>
+          <a:xfrm flipV="1">
+            <a:off x="864000" y="1476000"/>
+            <a:ext cx="324000" cy="324000"/>
+          </a:xfrm>
+          <a:prstGeom prst="line">
+            <a:avLst/>
+          </a:prstGeom>
+          <a:ln w="3600">
+            <a:solidFill>
+              <a:srgbClr val="FFFFFF"/>
+            </a:solidFill>
+          </a:ln>
+        </p:spPr>
+      </p:cxnSp>
+      <p:cxnSp>
+        <p:nvCxnSpPr>
+          <p:cNvPr id="28" name="Connector 27"/>
+          <p:cNvCxnSpPr/>
+          <p:nvPr/>
+        </p:nvCxnSpPr>
+        <p:spPr>
+          <a:xfrm flipV="1">
+            <a:off x="921600" y="1533600"/>
+            <a:ext cx="266400" cy="266400"/>
+          </a:xfrm>
+          <a:prstGeom prst="line">
+            <a:avLst/>
+          </a:prstGeom>
+          <a:ln w="3600">
+            <a:solidFill>
+              <a:srgbClr val="FFFFFF"/>
+            </a:solidFill>
+          </a:ln>
+        </p:spPr>
+      </p:cxnSp>
+      <p:cxnSp>
+        <p:nvCxnSpPr>
+          <p:cNvPr id="29" name="Connector 28"/>
+          <p:cNvCxnSpPr/>
+          <p:nvPr/>
+        </p:nvCxnSpPr>
+        <p:spPr>
+          <a:xfrm flipV="1">
+            <a:off x="979200" y="1591200"/>
+            <a:ext cx="208800" cy="208800"/>
+          </a:xfrm>
+          <a:prstGeom prst="line">
+            <a:avLst/>
+          </a:prstGeom>
+          <a:ln w="3600">
+            <a:solidFill>
+              <a:srgbClr val="FFFFFF"/>
+            </a:solidFill>
+          </a:ln>
+        </p:spPr>
+      </p:cxnSp>
+      <p:cxnSp>
+        <p:nvCxnSpPr>
+          <p:cNvPr id="30" name="Connector 29"/>
+          <p:cNvCxnSpPr/>
+          <p:nvPr/>
+        </p:nvCxnSpPr>
+        <p:spPr>
+          <a:xfrm flipV="1">
+            <a:off x="1036800" y="1648800"/>
+            <a:ext cx="151200" cy="151200"/>
+          </a:xfrm>
+          <a:prstGeom prst="line">
+            <a:avLst/>
+          </a:prstGeom>
+          <a:ln w="3600">
+            <a:solidFill>
+              <a:srgbClr val="FFFFFF"/>
+            </a:solidFill>
+          </a:ln>
+        </p:spPr>
+      </p:cxnSp>
+      <p:cxnSp>
+        <p:nvCxnSpPr>
+          <p:cNvPr id="31" name="Connector 30"/>
+          <p:cNvCxnSpPr/>
+          <p:nvPr/>
+        </p:nvCxnSpPr>
+        <p:spPr>
+          <a:xfrm flipV="1">
+            <a:off x="1094400" y="1706400"/>
+            <a:ext cx="93600" cy="93600"/>
+          </a:xfrm>
+          <a:prstGeom prst="line">
+            <a:avLst/>
+          </a:prstGeom>
+          <a:ln w="3600">
+            <a:solidFill>
+              <a:srgbClr val="FFFFFF"/>
+            </a:solidFill>
+          </a:ln>
+        </p:spPr>
+      </p:cxnSp>
+      <p:cxnSp>
+        <p:nvCxnSpPr>
+          <p:cNvPr id="32" name="Connector 31"/>
+          <p:cNvCxnSpPr/>
+          <p:nvPr/>
+        </p:nvCxnSpPr>
+        <p:spPr>
+          <a:xfrm flipV="1">
+            <a:off x="1152000" y="1764000"/>
+            <a:ext cx="36000" cy="36000"/>
+          </a:xfrm>
+          <a:prstGeom prst="line">
+            <a:avLst/>
+          </a:prstGeom>
+          <a:ln w="3600">
+            <a:solidFill>
+              <a:srgbClr val="FFFFFF"/>
+            </a:solidFill>
+          </a:ln>
+        </p:spPr>
+      </p:cxnSp>
+      <p:sp>
+        <p:nvSpPr>
+          <p:cNvPr id="33" name="Oval 32"/>
+          <p:cNvSpPr/>
+          <p:nvPr/>
+        </p:nvSpPr>
+        <p:spPr>
+          <a:xfrm>
+            <a:off x="216000" y="252000"/>
+            <a:ext cx="288000" cy="288000"/>
+          </a:xfrm>
+          <a:prstGeom prst="ellipse">
+            <a:avLst/>
+          </a:prstGeom>
+          <a:noFill/>
+          <a:ln w="5760">
+            <a:solidFill>
+              <a:srgbClr val="FFFFFF"/>
+            </a:solidFill>
+          </a:ln>
+        </p:spPr>
         <p:txBody>
           <a:bodyPr rtlCol="0" anchor="ctr"/>
           <a:lstStyle/>
@@ -3595,14 +4847,14 @@
       </p:sp>
       <p:sp>
         <p:nvSpPr>
-          <p:cNvPr id="4" name="텍스트"/>
+          <p:cNvPr id="34" name="텍스트"/>
           <p:cNvSpPr txBox="1"/>
           <p:nvPr/>
         </p:nvSpPr>
         <p:spPr>
           <a:xfrm>
-            <a:off x="2304000" y="684000"/>
-            <a:ext cx="720000" cy="432000"/>
+            <a:off x="216000" y="252000"/>
+            <a:ext cx="288000" cy="288000"/>
           </a:xfrm>
           <a:prstGeom prst="rect">
             <a:avLst/>
@@ -3617,11 +4869,11 @@
           <a:p>
             <a:pPr algn="ctr">
               <a:lnSpc>
-                <a:spcPts val="4350"/>
+                <a:spcPts val="2030"/>
               </a:lnSpc>
             </a:pPr>
             <a:r>
-              <a:rPr sz="3000" b="1">
+              <a:rPr sz="1400" b="1">
                 <a:solidFill>
                   <a:srgbClr val="FFFFFF"/>
                 </a:solidFill>
@@ -3635,14 +4887,14 @@
       </p:sp>
       <p:sp>
         <p:nvSpPr>
-          <p:cNvPr id="5" name="텍스트"/>
+          <p:cNvPr id="35" name="텍스트"/>
           <p:cNvSpPr txBox="1"/>
           <p:nvPr/>
         </p:nvSpPr>
         <p:spPr>
           <a:xfrm>
-            <a:off x="252000" y="540000"/>
-            <a:ext cx="1620000" cy="720000"/>
+            <a:off x="216000" y="1440000"/>
+            <a:ext cx="828000" cy="142876"/>
           </a:xfrm>
           <a:prstGeom prst="rect">
             <a:avLst/>
@@ -3657,49 +4909,215 @@
           <a:p>
             <a:pPr algn="l">
               <a:lnSpc>
-                <a:spcPts val="1739"/>
+                <a:spcPts val="1087"/>
               </a:lnSpc>
             </a:pPr>
             <a:r>
-              <a:rPr sz="1200" b="1">
+              <a:rPr sz="750" b="1" spc="100">
+                <a:solidFill>
+                  <a:srgbClr val="FFFFFF"/>
+                </a:solidFill>
+                <a:latin typeface="맑은 고딕"/>
+                <a:ea typeface="맑은 고딕"/>
+              </a:rPr>
+              <a:t>전문 분야</a:t>
+            </a:r>
+          </a:p>
+        </p:txBody>
+      </p:sp>
+      <p:sp>
+        <p:nvSpPr>
+          <p:cNvPr id="36" name="텍스트"/>
+          <p:cNvSpPr txBox="1"/>
+          <p:nvPr/>
+        </p:nvSpPr>
+        <p:spPr>
+          <a:xfrm>
+            <a:off x="1440000" y="223200"/>
+            <a:ext cx="1080000" cy="99061"/>
+          </a:xfrm>
+          <a:prstGeom prst="rect">
+            <a:avLst/>
+          </a:prstGeom>
+          <a:noFill/>
+        </p:spPr>
+        <p:txBody>
+          <a:bodyPr wrap="square" lIns="0" rIns="0" tIns="0" bIns="0" anchor="t">
+            <a:spAutoFit/>
+          </a:bodyPr>
+          <a:lstStyle/>
+          <a:p>
+            <a:pPr algn="l">
+              <a:lnSpc>
+                <a:spcPts val="754"/>
+              </a:lnSpc>
+            </a:pPr>
+            <a:r>
+              <a:rPr sz="520" b="1" spc="240">
+                <a:solidFill>
+                  <a:srgbClr val="6B7280"/>
+                </a:solidFill>
+                <a:latin typeface="맑은 고딕"/>
+                <a:ea typeface="맑은 고딕"/>
+              </a:rPr>
+              <a:t>전문 분야</a:t>
+            </a:r>
+          </a:p>
+        </p:txBody>
+      </p:sp>
+      <p:cxnSp>
+        <p:nvCxnSpPr>
+          <p:cNvPr id="37" name="Connector 36"/>
+          <p:cNvCxnSpPr/>
+          <p:nvPr/>
+        </p:nvCxnSpPr>
+        <p:spPr>
+          <a:xfrm>
+            <a:off x="1440000" y="360000"/>
+            <a:ext cx="1548000" cy="0"/>
+          </a:xfrm>
+          <a:prstGeom prst="line">
+            <a:avLst/>
+          </a:prstGeom>
+          <a:ln w="3600">
+            <a:solidFill>
+              <a:srgbClr val="DCDFE4"/>
+            </a:solidFill>
+          </a:ln>
+        </p:spPr>
+      </p:cxnSp>
+      <p:sp>
+        <p:nvSpPr>
+          <p:cNvPr id="38" name="텍스트"/>
+          <p:cNvSpPr txBox="1"/>
+          <p:nvPr/>
+        </p:nvSpPr>
+        <p:spPr>
+          <a:xfrm>
+            <a:off x="1440000" y="403200"/>
+            <a:ext cx="1296000" cy="133351"/>
+          </a:xfrm>
+          <a:prstGeom prst="rect">
+            <a:avLst/>
+          </a:prstGeom>
+          <a:noFill/>
+        </p:spPr>
+        <p:txBody>
+          <a:bodyPr wrap="square" lIns="0" rIns="0" tIns="0" bIns="0" anchor="t">
+            <a:spAutoFit/>
+          </a:bodyPr>
+          <a:lstStyle/>
+          <a:p>
+            <a:pPr algn="l">
+              <a:lnSpc>
+                <a:spcPts val="1015"/>
+              </a:lnSpc>
+            </a:pPr>
+            <a:r>
+              <a:rPr sz="700" b="0">
                 <a:solidFill>
                   <a:srgbClr val="12151C"/>
                 </a:solidFill>
                 <a:latin typeface="맑은 고딕"/>
                 <a:ea typeface="맑은 고딕"/>
               </a:rPr>
-              <a:t>데이터 너머의</a:t>
-            </a:r>
-          </a:p>
+              <a:t>번역</a:t>
+            </a:r>
+          </a:p>
+        </p:txBody>
+      </p:sp>
+      <p:cxnSp>
+        <p:nvCxnSpPr>
+          <p:cNvPr id="39" name="Connector 38"/>
+          <p:cNvCxnSpPr/>
+          <p:nvPr/>
+        </p:nvCxnSpPr>
+        <p:spPr>
+          <a:xfrm>
+            <a:off x="1440000" y="561600"/>
+            <a:ext cx="1548000" cy="0"/>
+          </a:xfrm>
+          <a:prstGeom prst="line">
+            <a:avLst/>
+          </a:prstGeom>
+          <a:ln w="3600">
+            <a:solidFill>
+              <a:srgbClr val="DCDFE4"/>
+            </a:solidFill>
+          </a:ln>
+        </p:spPr>
+      </p:cxnSp>
+      <p:sp>
+        <p:nvSpPr>
+          <p:cNvPr id="40" name="텍스트"/>
+          <p:cNvSpPr txBox="1"/>
+          <p:nvPr/>
+        </p:nvSpPr>
+        <p:spPr>
+          <a:xfrm>
+            <a:off x="1440000" y="604800"/>
+            <a:ext cx="1296000" cy="133351"/>
+          </a:xfrm>
+          <a:prstGeom prst="rect">
+            <a:avLst/>
+          </a:prstGeom>
+          <a:noFill/>
+        </p:spPr>
+        <p:txBody>
+          <a:bodyPr wrap="square" lIns="0" rIns="0" tIns="0" bIns="0" anchor="t">
+            <a:spAutoFit/>
+          </a:bodyPr>
+          <a:lstStyle/>
           <a:p>
             <a:pPr algn="l">
               <a:lnSpc>
-                <a:spcPts val="1739"/>
+                <a:spcPts val="1015"/>
               </a:lnSpc>
             </a:pPr>
             <a:r>
-              <a:rPr sz="1200" b="1">
+              <a:rPr sz="700" b="0">
                 <a:solidFill>
                   <a:srgbClr val="12151C"/>
                 </a:solidFill>
                 <a:latin typeface="맑은 고딕"/>
                 <a:ea typeface="맑은 고딕"/>
               </a:rPr>
-              <a:t>사람을 봅니다</a:t>
-            </a:r>
-          </a:p>
-        </p:txBody>
-      </p:sp>
-      <p:sp>
-        <p:nvSpPr>
-          <p:cNvPr id="6" name="텍스트"/>
+              <a:t>카피라이팅</a:t>
+            </a:r>
+          </a:p>
+        </p:txBody>
+      </p:sp>
+      <p:cxnSp>
+        <p:nvCxnSpPr>
+          <p:cNvPr id="41" name="Connector 40"/>
+          <p:cNvCxnSpPr/>
+          <p:nvPr/>
+        </p:nvCxnSpPr>
+        <p:spPr>
+          <a:xfrm>
+            <a:off x="1440000" y="763200"/>
+            <a:ext cx="1548000" cy="0"/>
+          </a:xfrm>
+          <a:prstGeom prst="line">
+            <a:avLst/>
+          </a:prstGeom>
+          <a:ln w="3600">
+            <a:solidFill>
+              <a:srgbClr val="DCDFE4"/>
+            </a:solidFill>
+          </a:ln>
+        </p:spPr>
+      </p:cxnSp>
+      <p:sp>
+        <p:nvSpPr>
+          <p:cNvPr id="42" name="텍스트"/>
           <p:cNvSpPr txBox="1"/>
           <p:nvPr/>
         </p:nvSpPr>
         <p:spPr>
           <a:xfrm>
-            <a:off x="252000" y="1512000"/>
-            <a:ext cx="1584000" cy="123826"/>
+            <a:off x="1440000" y="806400"/>
+            <a:ext cx="1296000" cy="133351"/>
           </a:xfrm>
           <a:prstGeom prst="rect">
             <a:avLst/>
@@ -3714,18 +5132,140 @@
           <a:p>
             <a:pPr algn="l">
               <a:lnSpc>
-                <a:spcPts val="942"/>
+                <a:spcPts val="1015"/>
               </a:lnSpc>
             </a:pPr>
             <a:r>
-              <a:rPr sz="650" b="1" spc="200">
+              <a:rPr sz="700" b="0">
+                <a:solidFill>
+                  <a:srgbClr val="12151C"/>
+                </a:solidFill>
+                <a:latin typeface="맑은 고딕"/>
+                <a:ea typeface="맑은 고딕"/>
+              </a:rPr>
+              <a:t>원고 집필</a:t>
+            </a:r>
+          </a:p>
+        </p:txBody>
+      </p:sp>
+      <p:cxnSp>
+        <p:nvCxnSpPr>
+          <p:cNvPr id="43" name="Connector 42"/>
+          <p:cNvCxnSpPr/>
+          <p:nvPr/>
+        </p:nvCxnSpPr>
+        <p:spPr>
+          <a:xfrm>
+            <a:off x="1440000" y="964800"/>
+            <a:ext cx="1548000" cy="0"/>
+          </a:xfrm>
+          <a:prstGeom prst="line">
+            <a:avLst/>
+          </a:prstGeom>
+          <a:ln w="3600">
+            <a:solidFill>
+              <a:srgbClr val="DCDFE4"/>
+            </a:solidFill>
+          </a:ln>
+        </p:spPr>
+      </p:cxnSp>
+      <p:sp>
+        <p:nvSpPr>
+          <p:cNvPr id="44" name="텍스트"/>
+          <p:cNvSpPr txBox="1"/>
+          <p:nvPr/>
+        </p:nvSpPr>
+        <p:spPr>
+          <a:xfrm>
+            <a:off x="1440000" y="1008000"/>
+            <a:ext cx="1296000" cy="133351"/>
+          </a:xfrm>
+          <a:prstGeom prst="rect">
+            <a:avLst/>
+          </a:prstGeom>
+          <a:noFill/>
+        </p:spPr>
+        <p:txBody>
+          <a:bodyPr wrap="square" lIns="0" rIns="0" tIns="0" bIns="0" anchor="t">
+            <a:spAutoFit/>
+          </a:bodyPr>
+          <a:lstStyle/>
+          <a:p>
+            <a:pPr algn="l">
+              <a:lnSpc>
+                <a:spcPts val="1015"/>
+              </a:lnSpc>
+            </a:pPr>
+            <a:r>
+              <a:rPr sz="700" b="0">
+                <a:solidFill>
+                  <a:srgbClr val="12151C"/>
+                </a:solidFill>
+                <a:latin typeface="맑은 고딕"/>
+                <a:ea typeface="맑은 고딕"/>
+              </a:rPr>
+              <a:t>자문</a:t>
+            </a:r>
+          </a:p>
+        </p:txBody>
+      </p:sp>
+      <p:cxnSp>
+        <p:nvCxnSpPr>
+          <p:cNvPr id="45" name="Connector 44"/>
+          <p:cNvCxnSpPr/>
+          <p:nvPr/>
+        </p:nvCxnSpPr>
+        <p:spPr>
+          <a:xfrm>
+            <a:off x="1440000" y="1166400"/>
+            <a:ext cx="1548000" cy="0"/>
+          </a:xfrm>
+          <a:prstGeom prst="line">
+            <a:avLst/>
+          </a:prstGeom>
+          <a:ln w="3600">
+            <a:solidFill>
+              <a:srgbClr val="DCDFE4"/>
+            </a:solidFill>
+          </a:ln>
+        </p:spPr>
+      </p:cxnSp>
+      <p:sp>
+        <p:nvSpPr>
+          <p:cNvPr id="46" name="텍스트"/>
+          <p:cNvSpPr txBox="1"/>
+          <p:nvPr/>
+        </p:nvSpPr>
+        <p:spPr>
+          <a:xfrm>
+            <a:off x="1440000" y="1569600"/>
+            <a:ext cx="1548000" cy="114301"/>
+          </a:xfrm>
+          <a:prstGeom prst="rect">
+            <a:avLst/>
+          </a:prstGeom>
+          <a:noFill/>
+        </p:spPr>
+        <p:txBody>
+          <a:bodyPr wrap="square" lIns="0" rIns="0" tIns="0" bIns="0" anchor="t">
+            <a:spAutoFit/>
+          </a:bodyPr>
+          <a:lstStyle/>
+          <a:p>
+            <a:pPr algn="l">
+              <a:lnSpc>
+                <a:spcPts val="869"/>
+              </a:lnSpc>
+            </a:pPr>
+            <a:r>
+              <a:rPr sz="600" b="0">
                 <a:solidFill>
                   <a:srgbClr val="6B7280"/>
                 </a:solidFill>
                 <a:latin typeface="맑은 고딕"/>
                 <a:ea typeface="맑은 고딕"/>
               </a:rPr>
-              <a:t>소속 · 브랜드</a:t>
+              <a:t>메일 · 메시지 문의   |   @아이디</a:t>
             </a:r>
           </a:p>
         </p:txBody>
